--- a/courses/build/farmer-money/R-D2.pptx
+++ b/courses/build/farmer-money/R-D2.pptx
@@ -5411,7 +5411,7 @@
     <p:bg>
       <p:bgPr>
         <a:solidFill>
-          <a:srgbClr val="1F4D2B"/>
+          <a:srgbClr val="4B2E4F"/>
         </a:solidFill>
         <a:effectLst/>
       </p:bgPr>
@@ -5453,9 +5453,9 @@
             <a:r>
               <a:rPr sz="1000" b="0">
                 <a:solidFill>
-                  <a:srgbClr val="A8D88A"/>
-                </a:solidFill>
-                <a:latin typeface="Arial"/>
+                  <a:srgbClr val="FFF4E0"/>
+                </a:solidFill>
+                <a:latin typeface="Calibri"/>
               </a:rPr>
               <a:t>R-D2-01</a:t>
             </a:r>
@@ -5492,9 +5492,9 @@
             <a:r>
               <a:rPr sz="1000" b="0">
                 <a:solidFill>
-                  <a:srgbClr val="A8D88A"/>
-                </a:solidFill>
-                <a:latin typeface="Arial"/>
+                  <a:srgbClr val="FFF4E0"/>
+                </a:solidFill>
+                <a:latin typeface="Calibri"/>
               </a:rPr>
               <a:t>Farmer Money</a:t>
             </a:r>
@@ -5531,9 +5531,9 @@
             <a:r>
               <a:rPr sz="4800" b="1">
                 <a:solidFill>
-                  <a:srgbClr val="F7F2E9"/>
-                </a:solidFill>
-                <a:latin typeface="Georgia"/>
+                  <a:srgbClr val="FFF4E0"/>
+                </a:solidFill>
+                <a:latin typeface="Arial Rounded MT Bold"/>
               </a:rPr>
               <a:t>Day 2 · Farm money</a:t>
             </a:r>
@@ -5555,7 +5555,7 @@
             <a:avLst/>
           </a:prstGeom>
           <a:solidFill>
-            <a:srgbClr val="C07A1E"/>
+            <a:srgbClr val="2A8C82"/>
           </a:solidFill>
           <a:ln>
             <a:noFill/>
@@ -5614,9 +5614,9 @@
             <a:r>
               <a:rPr sz="2400" b="0">
                 <a:solidFill>
-                  <a:srgbClr val="A8D88A"/>
-                </a:solidFill>
-                <a:latin typeface="Arial"/>
+                  <a:srgbClr val="FFF4E0"/>
+                </a:solidFill>
+                <a:latin typeface="Calibri"/>
               </a:rPr>
               <a:t>Farmer Money · Day 2 of 3</a:t>
             </a:r>
@@ -5630,9 +5630,9 @@
             <a:r>
               <a:rPr sz="2400" b="0">
                 <a:solidFill>
-                  <a:srgbClr val="A8D88A"/>
-                </a:solidFill>
-                <a:latin typeface="Arial"/>
+                  <a:srgbClr val="FFF4E0"/>
+                </a:solidFill>
+                <a:latin typeface="Calibri"/>
               </a:rPr>
               <a:t>Write it · count it · price it</a:t>
             </a:r>
@@ -5677,7 +5677,7 @@
     <p:bg>
       <p:bgPr>
         <a:solidFill>
-          <a:srgbClr val="F7F2E9"/>
+          <a:srgbClr val="FFF4E0"/>
         </a:solidFill>
         <a:effectLst/>
       </p:bgPr>
@@ -5719,9 +5719,9 @@
             <a:r>
               <a:rPr sz="1000" b="0">
                 <a:solidFill>
-                  <a:srgbClr val="6B6255"/>
-                </a:solidFill>
-                <a:latin typeface="Arial"/>
+                  <a:srgbClr val="2B2B2B"/>
+                </a:solidFill>
+                <a:latin typeface="Calibri"/>
               </a:rPr>
               <a:t>R-D2-10</a:t>
             </a:r>
@@ -5758,9 +5758,9 @@
             <a:r>
               <a:rPr sz="1000" b="0">
                 <a:solidFill>
-                  <a:srgbClr val="6B6255"/>
-                </a:solidFill>
-                <a:latin typeface="Arial"/>
+                  <a:srgbClr val="2B2B2B"/>
+                </a:solidFill>
+                <a:latin typeface="Calibri"/>
               </a:rPr>
               <a:t>Farmer Money</a:t>
             </a:r>
@@ -5782,7 +5782,7 @@
             <a:avLst/>
           </a:prstGeom>
           <a:solidFill>
-            <a:srgbClr val="C07A1E"/>
+            <a:srgbClr val="2A8C82"/>
           </a:solidFill>
           <a:ln>
             <a:noFill/>
@@ -5841,9 +5841,9 @@
             <a:r>
               <a:rPr sz="1400" b="1">
                 <a:solidFill>
-                  <a:srgbClr val="F7F2E9"/>
-                </a:solidFill>
-                <a:latin typeface="Arial"/>
+                  <a:srgbClr val="FFF4E0"/>
+                </a:solidFill>
+                <a:latin typeface="Calibri"/>
               </a:rPr>
               <a:t>YOUR TURN</a:t>
             </a:r>
@@ -5880,9 +5880,9 @@
             <a:r>
               <a:rPr sz="3800" b="1">
                 <a:solidFill>
-                  <a:srgbClr val="1F4D2B"/>
-                </a:solidFill>
-                <a:latin typeface="Georgia"/>
+                  <a:srgbClr val="2B2B2B"/>
+                </a:solidFill>
+                <a:latin typeface="Arial Rounded MT Bold"/>
               </a:rPr>
               <a:t>Harvest, bunch, record</a:t>
             </a:r>
@@ -5904,7 +5904,7 @@
             <a:avLst/>
           </a:prstGeom>
           <a:solidFill>
-            <a:srgbClr val="E2D8C4"/>
+            <a:srgbClr val="E0664A"/>
           </a:solidFill>
           <a:ln>
             <a:noFill/>
@@ -5963,9 +5963,9 @@
             <a:r>
               <a:rPr sz="2600" b="1">
                 <a:solidFill>
-                  <a:srgbClr val="20190F"/>
-                </a:solidFill>
-                <a:latin typeface="Arial"/>
+                  <a:srgbClr val="2B2B2B"/>
+                </a:solidFill>
+                <a:latin typeface="Calibri"/>
               </a:rPr>
               <a:t>•  Harvest 5 bunches — outer leaves</a:t>
             </a:r>
@@ -5979,9 +5979,9 @@
             <a:r>
               <a:rPr sz="2600" b="1">
                 <a:solidFill>
-                  <a:srgbClr val="20190F"/>
-                </a:solidFill>
-                <a:latin typeface="Arial"/>
+                  <a:srgbClr val="2B2B2B"/>
+                </a:solidFill>
+                <a:latin typeface="Calibri"/>
               </a:rPr>
               <a:t>•  Weigh one bunch</a:t>
             </a:r>
@@ -5995,9 +5995,9 @@
             <a:r>
               <a:rPr sz="2600" b="1">
                 <a:solidFill>
-                  <a:srgbClr val="20190F"/>
-                </a:solidFill>
-                <a:latin typeface="Arial"/>
+                  <a:srgbClr val="2B2B2B"/>
+                </a:solidFill>
+                <a:latin typeface="Calibri"/>
               </a:rPr>
               <a:t>•  Fill the harvest record (25 min)</a:t>
             </a:r>
@@ -6019,11 +6019,11 @@
             <a:avLst/>
           </a:prstGeom>
           <a:solidFill>
-            <a:srgbClr val="FBF6EC"/>
+            <a:srgbClr val="FFF4E0"/>
           </a:solidFill>
           <a:ln w="15875">
             <a:solidFill>
-              <a:srgbClr val="E2D8C4"/>
+              <a:srgbClr val="E0664A"/>
             </a:solidFill>
           </a:ln>
           <a:effectLst/>
@@ -6080,9 +6080,9 @@
             <a:r>
               <a:rPr sz="1200" b="1">
                 <a:solidFill>
-                  <a:srgbClr val="C07A1E"/>
-                </a:solidFill>
-                <a:latin typeface="Arial"/>
+                  <a:srgbClr val="2A8C82"/>
+                </a:solidFill>
+                <a:latin typeface="Calibri"/>
               </a:rPr>
               <a:t>IMAGE · R-IMG-07 · coming</a:t>
             </a:r>
@@ -6119,9 +6119,9 @@
             <a:r>
               <a:rPr sz="1800" b="1">
                 <a:solidFill>
-                  <a:srgbClr val="1F4D2B"/>
-                </a:solidFill>
-                <a:latin typeface="Georgia"/>
+                  <a:srgbClr val="2B2B2B"/>
+                </a:solidFill>
+                <a:latin typeface="Arial Rounded MT Bold"/>
               </a:rPr>
               <a:t>Bunches weighed and counted</a:t>
             </a:r>
@@ -6158,9 +6158,9 @@
             <a:r>
               <a:rPr sz="1100" b="0">
                 <a:solidFill>
-                  <a:srgbClr val="20190F"/>
-                </a:solidFill>
-                <a:latin typeface="Arial"/>
+                  <a:srgbClr val="2B2B2B"/>
+                </a:solidFill>
+                <a:latin typeface="Calibri"/>
               </a:rPr>
               <a:t>At the edge of a garden bed, a group of five (mixed ages) around a crate: one cuts outer leaves of leafy greens (leaving the heart), one ties even bunches with rubber bands, one hangs a bunch on a simple kitchen hanging scale, one sits on a bucket writing in a harvest record (lines only), one carries a basket. Morning light from the north. No text.</a:t>
             </a:r>
@@ -6181,7 +6181,7 @@
     <p:bg>
       <p:bgPr>
         <a:solidFill>
-          <a:srgbClr val="F7F2E9"/>
+          <a:srgbClr val="FFF4E0"/>
         </a:solidFill>
         <a:effectLst/>
       </p:bgPr>
@@ -6223,9 +6223,9 @@
             <a:r>
               <a:rPr sz="1000" b="0">
                 <a:solidFill>
-                  <a:srgbClr val="6B6255"/>
-                </a:solidFill>
-                <a:latin typeface="Arial"/>
+                  <a:srgbClr val="2B2B2B"/>
+                </a:solidFill>
+                <a:latin typeface="Calibri"/>
               </a:rPr>
               <a:t>R-D2-11   ·   Poster R-P09</a:t>
             </a:r>
@@ -6262,9 +6262,9 @@
             <a:r>
               <a:rPr sz="1000" b="0">
                 <a:solidFill>
-                  <a:srgbClr val="6B6255"/>
-                </a:solidFill>
-                <a:latin typeface="Arial"/>
+                  <a:srgbClr val="2B2B2B"/>
+                </a:solidFill>
+                <a:latin typeface="Calibri"/>
               </a:rPr>
               <a:t>Farmer Money</a:t>
             </a:r>
@@ -6301,9 +6301,9 @@
             <a:r>
               <a:rPr sz="3800" b="1">
                 <a:solidFill>
-                  <a:srgbClr val="1F4D2B"/>
-                </a:solidFill>
-                <a:latin typeface="Georgia"/>
+                  <a:srgbClr val="2B2B2B"/>
+                </a:solidFill>
+                <a:latin typeface="Arial Rounded MT Bold"/>
               </a:rPr>
               <a:t>Food eaten is money saved</a:t>
             </a:r>
@@ -6325,7 +6325,7 @@
             <a:avLst/>
           </a:prstGeom>
           <a:solidFill>
-            <a:srgbClr val="E2D8C4"/>
+            <a:srgbClr val="E0664A"/>
           </a:solidFill>
           <a:ln>
             <a:noFill/>
@@ -6384,9 +6384,9 @@
             <a:r>
               <a:rPr sz="2800" b="0">
                 <a:solidFill>
-                  <a:srgbClr val="20190F"/>
-                </a:solidFill>
-                <a:latin typeface="Arial"/>
+                  <a:srgbClr val="2B2B2B"/>
+                </a:solidFill>
+                <a:latin typeface="Calibri"/>
               </a:rPr>
               <a:t>•  8 bunches × R12 = R96</a:t>
             </a:r>
@@ -6400,9 +6400,9 @@
             <a:r>
               <a:rPr sz="2800" b="0">
                 <a:solidFill>
-                  <a:srgbClr val="20190F"/>
-                </a:solidFill>
-                <a:latin typeface="Arial"/>
+                  <a:srgbClr val="2B2B2B"/>
+                </a:solidFill>
+                <a:latin typeface="Calibri"/>
               </a:rPr>
               <a:t>•  R96 stayed in Gogo's purse</a:t>
             </a:r>
@@ -6416,9 +6416,9 @@
             <a:r>
               <a:rPr sz="2800" b="0">
                 <a:solidFill>
-                  <a:srgbClr val="20190F"/>
-                </a:solidFill>
-                <a:latin typeface="Arial"/>
+                  <a:srgbClr val="2B2B2B"/>
+                </a:solidFill>
+                <a:latin typeface="Calibri"/>
               </a:rPr>
               <a:t>•  A season: R480 not spent</a:t>
             </a:r>
@@ -6440,11 +6440,11 @@
             <a:avLst/>
           </a:prstGeom>
           <a:solidFill>
-            <a:srgbClr val="FBF6EC"/>
+            <a:srgbClr val="FFF4E0"/>
           </a:solidFill>
           <a:ln w="15875">
             <a:solidFill>
-              <a:srgbClr val="E2D8C4"/>
+              <a:srgbClr val="E0664A"/>
             </a:solidFill>
           </a:ln>
           <a:effectLst/>
@@ -6501,9 +6501,9 @@
             <a:r>
               <a:rPr sz="1200" b="1">
                 <a:solidFill>
-                  <a:srgbClr val="C07A1E"/>
-                </a:solidFill>
-                <a:latin typeface="Arial"/>
+                  <a:srgbClr val="2A8C82"/>
+                </a:solidFill>
+                <a:latin typeface="Calibri"/>
               </a:rPr>
               <a:t>POSTER ART · R-P09-ART · coming</a:t>
             </a:r>
@@ -6540,9 +6540,9 @@
             <a:r>
               <a:rPr sz="1800" b="1">
                 <a:solidFill>
-                  <a:srgbClr val="1F4D2B"/>
-                </a:solidFill>
-                <a:latin typeface="Georgia"/>
+                  <a:srgbClr val="2B2B2B"/>
+                </a:solidFill>
+                <a:latin typeface="Arial Rounded MT Bold"/>
               </a:rPr>
               <a:t>Artwork for R-P09 · Where did the harvest go?</a:t>
             </a:r>
@@ -6579,9 +6579,9 @@
             <a:r>
               <a:rPr sz="1100" b="0">
                 <a:solidFill>
-                  <a:srgbClr val="20190F"/>
-                </a:solidFill>
-                <a:latin typeface="Arial"/>
+                  <a:srgbClr val="2B2B2B"/>
+                </a:solidFill>
+                <a:latin typeface="Calibri"/>
               </a:rPr>
               <a:t>A big woven basket of leafy greens in the centre. Four arrows lead to: ① a family (gogo, mother, two children) eating from a pot of greens and pap at a table ② a woman handing a bunch over a fence to a neighbour ③ a buyer at the garden gate handing coins for a bunch ④ wilted leaves on the ground, a goat's head reaching through a broken fence, a snail on…</a:t>
             </a:r>
@@ -6602,7 +6602,7 @@
     <p:bg>
       <p:bgPr>
         <a:solidFill>
-          <a:srgbClr val="F7F2E9"/>
+          <a:srgbClr val="FFF4E0"/>
         </a:solidFill>
         <a:effectLst/>
       </p:bgPr>
@@ -6644,9 +6644,9 @@
             <a:r>
               <a:rPr sz="1000" b="0">
                 <a:solidFill>
-                  <a:srgbClr val="6B6255"/>
-                </a:solidFill>
-                <a:latin typeface="Arial"/>
+                  <a:srgbClr val="2B2B2B"/>
+                </a:solidFill>
+                <a:latin typeface="Calibri"/>
               </a:rPr>
               <a:t>R-D2-12   ·   Poster R-P10</a:t>
             </a:r>
@@ -6683,9 +6683,9 @@
             <a:r>
               <a:rPr sz="1000" b="0">
                 <a:solidFill>
-                  <a:srgbClr val="6B6255"/>
-                </a:solidFill>
-                <a:latin typeface="Arial"/>
+                  <a:srgbClr val="2B2B2B"/>
+                </a:solidFill>
+                <a:latin typeface="Calibri"/>
               </a:rPr>
               <a:t>Farmer Money</a:t>
             </a:r>
@@ -6722,9 +6722,9 @@
             <a:r>
               <a:rPr sz="3800" b="1">
                 <a:solidFill>
-                  <a:srgbClr val="1F4D2B"/>
-                </a:solidFill>
-                <a:latin typeface="Georgia"/>
+                  <a:srgbClr val="2B2B2B"/>
+                </a:solidFill>
+                <a:latin typeface="Arial Rounded MT Bold"/>
               </a:rPr>
               <a:t>Count every cost</a:t>
             </a:r>
@@ -6746,7 +6746,7 @@
             <a:avLst/>
           </a:prstGeom>
           <a:solidFill>
-            <a:srgbClr val="E2D8C4"/>
+            <a:srgbClr val="E0664A"/>
           </a:solidFill>
           <a:ln>
             <a:noFill/>
@@ -6805,9 +6805,9 @@
             <a:r>
               <a:rPr sz="2400" b="0">
                 <a:solidFill>
-                  <a:srgbClr val="20190F"/>
-                </a:solidFill>
-                <a:latin typeface="Arial"/>
+                  <a:srgbClr val="2B2B2B"/>
+                </a:solidFill>
+                <a:latin typeface="Calibri"/>
               </a:rPr>
               <a:t>•  Seed · compost · water · transport</a:t>
             </a:r>
@@ -6821,9 +6821,9 @@
             <a:r>
               <a:rPr sz="2400" b="0">
                 <a:solidFill>
-                  <a:srgbClr val="20190F"/>
-                </a:solidFill>
-                <a:latin typeface="Arial"/>
+                  <a:srgbClr val="2B2B2B"/>
+                </a:solidFill>
+                <a:latin typeface="Calibri"/>
               </a:rPr>
               <a:t>•  Bands, bags, tools</a:t>
             </a:r>
@@ -6837,9 +6837,9 @@
             <a:r>
               <a:rPr sz="2400" b="0">
                 <a:solidFill>
-                  <a:srgbClr val="20190F"/>
-                </a:solidFill>
-                <a:latin typeface="Arial"/>
+                  <a:srgbClr val="2B2B2B"/>
+                </a:solidFill>
+                <a:latin typeface="Calibri"/>
               </a:rPr>
               <a:t>•  Your time</a:t>
             </a:r>
@@ -6861,11 +6861,11 @@
             <a:avLst/>
           </a:prstGeom>
           <a:solidFill>
-            <a:srgbClr val="FBF6EC"/>
+            <a:srgbClr val="FFF4E0"/>
           </a:solidFill>
           <a:ln w="15875">
             <a:solidFill>
-              <a:srgbClr val="E2D8C4"/>
+              <a:srgbClr val="E0664A"/>
             </a:solidFill>
           </a:ln>
           <a:effectLst/>
@@ -6922,9 +6922,9 @@
             <a:r>
               <a:rPr sz="1200" b="1">
                 <a:solidFill>
-                  <a:srgbClr val="C07A1E"/>
-                </a:solidFill>
-                <a:latin typeface="Arial"/>
+                  <a:srgbClr val="2A8C82"/>
+                </a:solidFill>
+                <a:latin typeface="Calibri"/>
               </a:rPr>
               <a:t>POSTER ART · R-P10-ART · coming</a:t>
             </a:r>
@@ -6961,9 +6961,9 @@
             <a:r>
               <a:rPr sz="1800" b="1">
                 <a:solidFill>
-                  <a:srgbClr val="1F4D2B"/>
-                </a:solidFill>
-                <a:latin typeface="Georgia"/>
+                  <a:srgbClr val="2B2B2B"/>
+                </a:solidFill>
+                <a:latin typeface="Arial Rounded MT Bold"/>
               </a:rPr>
               <a:t>Artwork for R-P10 · Count every cost</a:t>
             </a:r>
@@ -7000,9 +7000,9 @@
             <a:r>
               <a:rPr sz="1100" b="0">
                 <a:solidFill>
-                  <a:srgbClr val="20190F"/>
-                </a:solidFill>
-                <a:latin typeface="Arial"/>
+                  <a:srgbClr val="2B2B2B"/>
+                </a:solidFill>
+                <a:latin typeface="Calibri"/>
               </a:rPr>
               <a:t>A healthy leafy bed in the centre (generic greens). Six items around it, each linked by a dotted line: ① a blank seed packet with a seed shape ② a bag of compost and a wheelbarrow of kraal manure ③ a JoJo-style tank with a tap and a watering can ④ a minibus taxi ⑤ rubber bands, a spade, a watering can ⑥ a clock beside a woman bent over the bed working.…</a:t>
             </a:r>
@@ -7023,7 +7023,7 @@
     <p:bg>
       <p:bgPr>
         <a:solidFill>
-          <a:srgbClr val="F7F2E9"/>
+          <a:srgbClr val="FFF4E0"/>
         </a:solidFill>
         <a:effectLst/>
       </p:bgPr>
@@ -7065,9 +7065,9 @@
             <a:r>
               <a:rPr sz="1000" b="0">
                 <a:solidFill>
-                  <a:srgbClr val="6B6255"/>
-                </a:solidFill>
-                <a:latin typeface="Arial"/>
+                  <a:srgbClr val="2B2B2B"/>
+                </a:solidFill>
+                <a:latin typeface="Calibri"/>
               </a:rPr>
               <a:t>R-D2-13</a:t>
             </a:r>
@@ -7104,9 +7104,9 @@
             <a:r>
               <a:rPr sz="1000" b="0">
                 <a:solidFill>
-                  <a:srgbClr val="6B6255"/>
-                </a:solidFill>
-                <a:latin typeface="Arial"/>
+                  <a:srgbClr val="2B2B2B"/>
+                </a:solidFill>
+                <a:latin typeface="Calibri"/>
               </a:rPr>
               <a:t>Farmer Money</a:t>
             </a:r>
@@ -7128,7 +7128,7 @@
             <a:avLst/>
           </a:prstGeom>
           <a:solidFill>
-            <a:srgbClr val="C07A1E"/>
+            <a:srgbClr val="2A8C82"/>
           </a:solidFill>
           <a:ln>
             <a:noFill/>
@@ -7187,9 +7187,9 @@
             <a:r>
               <a:rPr sz="1400" b="1">
                 <a:solidFill>
-                  <a:srgbClr val="F7F2E9"/>
-                </a:solidFill>
-                <a:latin typeface="Arial"/>
+                  <a:srgbClr val="FFF4E0"/>
+                </a:solidFill>
+                <a:latin typeface="Calibri"/>
               </a:rPr>
               <a:t>YOUR TURN</a:t>
             </a:r>
@@ -7226,9 +7226,9 @@
             <a:r>
               <a:rPr sz="3800" b="1">
                 <a:solidFill>
-                  <a:srgbClr val="1F4D2B"/>
-                </a:solidFill>
-                <a:latin typeface="Georgia"/>
+                  <a:srgbClr val="2B2B2B"/>
+                </a:solidFill>
+                <a:latin typeface="Arial Rounded MT Bold"/>
               </a:rPr>
               <a:t>Lerato's spinach bed</a:t>
             </a:r>
@@ -7250,7 +7250,7 @@
             <a:avLst/>
           </a:prstGeom>
           <a:solidFill>
-            <a:srgbClr val="E2D8C4"/>
+            <a:srgbClr val="E0664A"/>
           </a:solidFill>
           <a:ln>
             <a:noFill/>
@@ -7309,9 +7309,9 @@
             <a:r>
               <a:rPr sz="2600" b="1">
                 <a:solidFill>
-                  <a:srgbClr val="20190F"/>
-                </a:solidFill>
-                <a:latin typeface="Arial"/>
+                  <a:srgbClr val="2B2B2B"/>
+                </a:solidFill>
+                <a:latin typeface="Calibri"/>
               </a:rPr>
               <a:t>•  12 cost cards, two piles</a:t>
             </a:r>
@@ -7325,9 +7325,9 @@
             <a:r>
               <a:rPr sz="2600" b="1">
                 <a:solidFill>
-                  <a:srgbClr val="20190F"/>
-                </a:solidFill>
-                <a:latin typeface="Arial"/>
+                  <a:srgbClr val="2B2B2B"/>
+                </a:solidFill>
+                <a:latin typeface="Calibri"/>
               </a:rPr>
               <a:t>•  Add the cash costs</a:t>
             </a:r>
@@ -7341,9 +7341,9 @@
             <a:r>
               <a:rPr sz="2600" b="1">
                 <a:solidFill>
-                  <a:srgbClr val="20190F"/>
-                </a:solidFill>
-                <a:latin typeface="Arial"/>
+                  <a:srgbClr val="2B2B2B"/>
+                </a:solidFill>
+                <a:latin typeface="Calibri"/>
               </a:rPr>
               <a:t>•  Play money first, calculator last (20 min)</a:t>
             </a:r>
@@ -7365,11 +7365,11 @@
             <a:avLst/>
           </a:prstGeom>
           <a:solidFill>
-            <a:srgbClr val="FBF6EC"/>
+            <a:srgbClr val="FFF4E0"/>
           </a:solidFill>
           <a:ln w="15875">
             <a:solidFill>
-              <a:srgbClr val="E2D8C4"/>
+              <a:srgbClr val="E0664A"/>
             </a:solidFill>
           </a:ln>
           <a:effectLst/>
@@ -7426,9 +7426,9 @@
             <a:r>
               <a:rPr sz="1200" b="1">
                 <a:solidFill>
-                  <a:srgbClr val="C07A1E"/>
-                </a:solidFill>
-                <a:latin typeface="Arial"/>
+                  <a:srgbClr val="2A8C82"/>
+                </a:solidFill>
+                <a:latin typeface="Calibri"/>
               </a:rPr>
               <a:t>IMAGE · R-IMG-09 · coming</a:t>
             </a:r>
@@ -7465,9 +7465,9 @@
             <a:r>
               <a:rPr sz="1800" b="1">
                 <a:solidFill>
-                  <a:srgbClr val="1F4D2B"/>
-                </a:solidFill>
-                <a:latin typeface="Georgia"/>
+                  <a:srgbClr val="2B2B2B"/>
+                </a:solidFill>
+                <a:latin typeface="Arial Rounded MT Bold"/>
               </a:rPr>
               <a:t>Cost cards (12)</a:t>
             </a:r>
@@ -7504,9 +7504,9 @@
             <a:r>
               <a:rPr sz="1100" b="0">
                 <a:solidFill>
-                  <a:srgbClr val="20190F"/>
-                </a:solidFill>
-                <a:latin typeface="Arial"/>
+                  <a:srgbClr val="2B2B2B"/>
+                </a:solidFill>
+                <a:latin typeface="Calibri"/>
               </a:rPr>
               <a:t>A4 sheet, 12 cards (3 × 4), each one object, no text (amounts are printed on the card backs — printables P17): 1 seed packet (blank) · 2 compost bag · 3 wheelbarrow of kraal manure (dashed outline — "free but not free") · 4 tap with a watering can (municipal water) · 5 JoJo-style tank with rain (dashed outline) · 6 rubber bands · 7 minibus taxi · 8…</a:t>
             </a:r>
@@ -7527,7 +7527,7 @@
     <p:bg>
       <p:bgPr>
         <a:solidFill>
-          <a:srgbClr val="F7F2E9"/>
+          <a:srgbClr val="FFF4E0"/>
         </a:solidFill>
         <a:effectLst/>
       </p:bgPr>
@@ -7569,9 +7569,9 @@
             <a:r>
               <a:rPr sz="1000" b="0">
                 <a:solidFill>
-                  <a:srgbClr val="6B6255"/>
-                </a:solidFill>
-                <a:latin typeface="Arial"/>
+                  <a:srgbClr val="2B2B2B"/>
+                </a:solidFill>
+                <a:latin typeface="Calibri"/>
               </a:rPr>
               <a:t>R-D2-14   ·   Poster R-P10</a:t>
             </a:r>
@@ -7608,9 +7608,9 @@
             <a:r>
               <a:rPr sz="1000" b="0">
                 <a:solidFill>
-                  <a:srgbClr val="6B6255"/>
-                </a:solidFill>
-                <a:latin typeface="Arial"/>
+                  <a:srgbClr val="2B2B2B"/>
+                </a:solidFill>
+                <a:latin typeface="Calibri"/>
               </a:rPr>
               <a:t>Farmer Money</a:t>
             </a:r>
@@ -7647,9 +7647,9 @@
             <a:r>
               <a:rPr sz="3800" b="1">
                 <a:solidFill>
-                  <a:srgbClr val="1F4D2B"/>
-                </a:solidFill>
-                <a:latin typeface="Georgia"/>
+                  <a:srgbClr val="2B2B2B"/>
+                </a:solidFill>
+                <a:latin typeface="Arial Rounded MT Bold"/>
               </a:rPr>
               <a:t>The season's cost</a:t>
             </a:r>
@@ -7671,7 +7671,7 @@
             <a:avLst/>
           </a:prstGeom>
           <a:solidFill>
-            <a:srgbClr val="E2D8C4"/>
+            <a:srgbClr val="E0664A"/>
           </a:solidFill>
           <a:ln>
             <a:noFill/>
@@ -7730,9 +7730,9 @@
             <a:r>
               <a:rPr sz="2800" b="0">
                 <a:solidFill>
-                  <a:srgbClr val="20190F"/>
-                </a:solidFill>
-                <a:latin typeface="Arial"/>
+                  <a:srgbClr val="2B2B2B"/>
+                </a:solidFill>
+                <a:latin typeface="Calibri"/>
               </a:rPr>
               <a:t>•  Cash costs: R510</a:t>
             </a:r>
@@ -7746,9 +7746,9 @@
             <a:r>
               <a:rPr sz="2800" b="0">
                 <a:solidFill>
-                  <a:srgbClr val="20190F"/>
-                </a:solidFill>
-                <a:latin typeface="Arial"/>
+                  <a:srgbClr val="2B2B2B"/>
+                </a:solidFill>
+                <a:latin typeface="Calibri"/>
               </a:rPr>
               <a:t>•  Plus 44 hours of her time</a:t>
             </a:r>
@@ -7762,9 +7762,9 @@
             <a:r>
               <a:rPr sz="2800" b="0">
                 <a:solidFill>
-                  <a:srgbClr val="20190F"/>
-                </a:solidFill>
-                <a:latin typeface="Arial"/>
+                  <a:srgbClr val="2B2B2B"/>
+                </a:solidFill>
+                <a:latin typeface="Calibri"/>
               </a:rPr>
               <a:t>•  150 bunches picked</a:t>
             </a:r>
@@ -7809,7 +7809,7 @@
     <p:bg>
       <p:bgPr>
         <a:solidFill>
-          <a:srgbClr val="F7F2E9"/>
+          <a:srgbClr val="FFF4E0"/>
         </a:solidFill>
         <a:effectLst/>
       </p:bgPr>
@@ -7851,9 +7851,9 @@
             <a:r>
               <a:rPr sz="1000" b="0">
                 <a:solidFill>
-                  <a:srgbClr val="6B6255"/>
-                </a:solidFill>
-                <a:latin typeface="Arial"/>
+                  <a:srgbClr val="2B2B2B"/>
+                </a:solidFill>
+                <a:latin typeface="Calibri"/>
               </a:rPr>
               <a:t>R-D2-15</a:t>
             </a:r>
@@ -7890,9 +7890,9 @@
             <a:r>
               <a:rPr sz="1000" b="0">
                 <a:solidFill>
-                  <a:srgbClr val="6B6255"/>
-                </a:solidFill>
-                <a:latin typeface="Arial"/>
+                  <a:srgbClr val="2B2B2B"/>
+                </a:solidFill>
+                <a:latin typeface="Calibri"/>
               </a:rPr>
               <a:t>Farmer Money</a:t>
             </a:r>
@@ -7929,9 +7929,9 @@
             <a:r>
               <a:rPr sz="3800" b="1">
                 <a:solidFill>
-                  <a:srgbClr val="1F4D2B"/>
-                </a:solidFill>
-                <a:latin typeface="Georgia"/>
+                  <a:srgbClr val="2B2B2B"/>
+                </a:solidFill>
+                <a:latin typeface="Arial Rounded MT Bold"/>
               </a:rPr>
               <a:t>Keep every slip</a:t>
             </a:r>
@@ -7953,7 +7953,7 @@
             <a:avLst/>
           </a:prstGeom>
           <a:solidFill>
-            <a:srgbClr val="E2D8C4"/>
+            <a:srgbClr val="E0664A"/>
           </a:solidFill>
           <a:ln>
             <a:noFill/>
@@ -8012,9 +8012,9 @@
             <a:r>
               <a:rPr sz="2800" b="0">
                 <a:solidFill>
-                  <a:srgbClr val="20190F"/>
-                </a:solidFill>
-                <a:latin typeface="Arial"/>
+                  <a:srgbClr val="2B2B2B"/>
+                </a:solidFill>
+                <a:latin typeface="Calibri"/>
               </a:rPr>
               <a:t>•  Circle the total</a:t>
             </a:r>
@@ -8028,9 +8028,9 @@
             <a:r>
               <a:rPr sz="2800" b="0">
                 <a:solidFill>
-                  <a:srgbClr val="20190F"/>
-                </a:solidFill>
-                <a:latin typeface="Arial"/>
+                  <a:srgbClr val="2B2B2B"/>
+                </a:solidFill>
+                <a:latin typeface="Calibri"/>
               </a:rPr>
               <a:t>•  Glue it in, or envelope</a:t>
             </a:r>
@@ -8044,9 +8044,9 @@
             <a:r>
               <a:rPr sz="2800" b="0">
                 <a:solidFill>
-                  <a:srgbClr val="20190F"/>
-                </a:solidFill>
-                <a:latin typeface="Arial"/>
+                  <a:srgbClr val="2B2B2B"/>
+                </a:solidFill>
+                <a:latin typeface="Calibri"/>
               </a:rPr>
               <a:t>•  No slip? Write one</a:t>
             </a:r>
@@ -8068,11 +8068,11 @@
             <a:avLst/>
           </a:prstGeom>
           <a:solidFill>
-            <a:srgbClr val="FBF6EC"/>
+            <a:srgbClr val="FFF4E0"/>
           </a:solidFill>
           <a:ln w="15875">
             <a:solidFill>
-              <a:srgbClr val="E2D8C4"/>
+              <a:srgbClr val="E0664A"/>
             </a:solidFill>
           </a:ln>
           <a:effectLst/>
@@ -8129,9 +8129,9 @@
             <a:r>
               <a:rPr sz="1200" b="1">
                 <a:solidFill>
-                  <a:srgbClr val="C07A1E"/>
-                </a:solidFill>
-                <a:latin typeface="Arial"/>
+                  <a:srgbClr val="2A8C82"/>
+                </a:solidFill>
+                <a:latin typeface="Calibri"/>
               </a:rPr>
               <a:t>PHOTO · R-PHO-02 · coming</a:t>
             </a:r>
@@ -8168,9 +8168,9 @@
             <a:r>
               <a:rPr sz="1800" b="1">
                 <a:solidFill>
-                  <a:srgbClr val="1F4D2B"/>
-                </a:solidFill>
-                <a:latin typeface="Georgia"/>
+                  <a:srgbClr val="2B2B2B"/>
+                </a:solidFill>
+                <a:latin typeface="Arial Rounded MT Bold"/>
               </a:rPr>
               <a:t>A till slip glued into the book</a:t>
             </a:r>
@@ -8207,9 +8207,9 @@
             <a:r>
               <a:rPr sz="1100" b="0">
                 <a:solidFill>
-                  <a:srgbClr val="20190F"/>
-                </a:solidFill>
-                <a:latin typeface="Arial"/>
+                  <a:srgbClr val="2B2B2B"/>
+                </a:solidFill>
+                <a:latin typeface="Calibri"/>
               </a:rPr>
               <a:t>Real photograph: a till slip from an agri/hardware shop (seed and compost) glued onto the slip page (P2), the total circled in pen and the money-book line number written beside it. Blur or crop any shop name, card digits or personal details. 1920 × 1080.</a:t>
             </a:r>
@@ -8230,7 +8230,7 @@
     <p:bg>
       <p:bgPr>
         <a:solidFill>
-          <a:srgbClr val="F7F2E9"/>
+          <a:srgbClr val="FFF4E0"/>
         </a:solidFill>
         <a:effectLst/>
       </p:bgPr>
@@ -8272,9 +8272,9 @@
             <a:r>
               <a:rPr sz="1000" b="0">
                 <a:solidFill>
-                  <a:srgbClr val="6B6255"/>
-                </a:solidFill>
-                <a:latin typeface="Arial"/>
+                  <a:srgbClr val="2B2B2B"/>
+                </a:solidFill>
+                <a:latin typeface="Calibri"/>
               </a:rPr>
               <a:t>R-D2-16</a:t>
             </a:r>
@@ -8311,9 +8311,9 @@
             <a:r>
               <a:rPr sz="1000" b="0">
                 <a:solidFill>
-                  <a:srgbClr val="6B6255"/>
-                </a:solidFill>
-                <a:latin typeface="Arial"/>
+                  <a:srgbClr val="2B2B2B"/>
+                </a:solidFill>
+                <a:latin typeface="Calibri"/>
               </a:rPr>
               <a:t>Farmer Money</a:t>
             </a:r>
@@ -8335,7 +8335,7 @@
             <a:avLst/>
           </a:prstGeom>
           <a:solidFill>
-            <a:srgbClr val="235E86"/>
+            <a:srgbClr val="E0664A"/>
           </a:solidFill>
           <a:ln>
             <a:noFill/>
@@ -8394,9 +8394,9 @@
             <a:r>
               <a:rPr sz="1200" b="1">
                 <a:solidFill>
-                  <a:srgbClr val="F7F2E9"/>
-                </a:solidFill>
-                <a:latin typeface="Arial"/>
+                  <a:srgbClr val="FFF4E0"/>
+                </a:solidFill>
+                <a:latin typeface="Calibri"/>
               </a:rPr>
               <a:t>APP</a:t>
             </a:r>
@@ -8433,9 +8433,9 @@
             <a:r>
               <a:rPr sz="3800" b="1">
                 <a:solidFill>
-                  <a:srgbClr val="1F4D2B"/>
-                </a:solidFill>
-                <a:latin typeface="Georgia"/>
+                  <a:srgbClr val="2B2B2B"/>
+                </a:solidFill>
+                <a:latin typeface="Arial Rounded MT Bold"/>
               </a:rPr>
               <a:t>Scan a till slip</a:t>
             </a:r>
@@ -8457,7 +8457,7 @@
             <a:avLst/>
           </a:prstGeom>
           <a:solidFill>
-            <a:srgbClr val="E2D8C4"/>
+            <a:srgbClr val="E0664A"/>
           </a:solidFill>
           <a:ln>
             <a:noFill/>
@@ -8516,9 +8516,9 @@
             <a:r>
               <a:rPr sz="2800" b="0">
                 <a:solidFill>
-                  <a:srgbClr val="20190F"/>
-                </a:solidFill>
-                <a:latin typeface="Arial"/>
+                  <a:srgbClr val="2B2B2B"/>
+                </a:solidFill>
+                <a:latin typeface="Calibri"/>
               </a:rPr>
               <a:t>•  Spent → New entry</a:t>
             </a:r>
@@ -8532,9 +8532,9 @@
             <a:r>
               <a:rPr sz="2800" b="0">
                 <a:solidFill>
-                  <a:srgbClr val="20190F"/>
-                </a:solidFill>
-                <a:latin typeface="Arial"/>
+                  <a:srgbClr val="2B2B2B"/>
+                </a:solidFill>
+                <a:latin typeface="Calibri"/>
               </a:rPr>
               <a:t>•  Take photo → Read with Lima</a:t>
             </a:r>
@@ -8548,9 +8548,9 @@
             <a:r>
               <a:rPr sz="2800" b="0">
                 <a:solidFill>
-                  <a:srgbClr val="20190F"/>
-                </a:solidFill>
-                <a:latin typeface="Arial"/>
+                  <a:srgbClr val="2B2B2B"/>
+                </a:solidFill>
+                <a:latin typeface="Calibri"/>
               </a:rPr>
               <a:t>•  Check it, then save</a:t>
             </a:r>
@@ -8595,7 +8595,7 @@
     <p:bg>
       <p:bgPr>
         <a:solidFill>
-          <a:srgbClr val="1F4D2B"/>
+          <a:srgbClr val="4B2E4F"/>
         </a:solidFill>
         <a:effectLst/>
       </p:bgPr>
@@ -8637,9 +8637,9 @@
             <a:r>
               <a:rPr sz="1000" b="0">
                 <a:solidFill>
-                  <a:srgbClr val="A8D88A"/>
-                </a:solidFill>
-                <a:latin typeface="Arial"/>
+                  <a:srgbClr val="FFF4E0"/>
+                </a:solidFill>
+                <a:latin typeface="Calibri"/>
               </a:rPr>
               <a:t>R-D2-17   ·   Poster R-P11</a:t>
             </a:r>
@@ -8676,9 +8676,9 @@
             <a:r>
               <a:rPr sz="1000" b="0">
                 <a:solidFill>
-                  <a:srgbClr val="A8D88A"/>
-                </a:solidFill>
-                <a:latin typeface="Arial"/>
+                  <a:srgbClr val="FFF4E0"/>
+                </a:solidFill>
+                <a:latin typeface="Calibri"/>
               </a:rPr>
               <a:t>Farmer Money</a:t>
             </a:r>
@@ -8715,9 +8715,9 @@
             <a:r>
               <a:rPr sz="4800" b="1">
                 <a:solidFill>
-                  <a:srgbClr val="F7F2E9"/>
-                </a:solidFill>
-                <a:latin typeface="Georgia"/>
+                  <a:srgbClr val="FFF4E0"/>
+                </a:solidFill>
+                <a:latin typeface="Arial Rounded MT Bold"/>
               </a:rPr>
               <a:t>One bunch</a:t>
             </a:r>
@@ -8739,7 +8739,7 @@
             <a:avLst/>
           </a:prstGeom>
           <a:solidFill>
-            <a:srgbClr val="C07A1E"/>
+            <a:srgbClr val="2A8C82"/>
           </a:solidFill>
           <a:ln>
             <a:noFill/>
@@ -8798,9 +8798,9 @@
             <a:r>
               <a:rPr sz="2400" b="0">
                 <a:solidFill>
-                  <a:srgbClr val="A8D88A"/>
-                </a:solidFill>
-                <a:latin typeface="Arial"/>
+                  <a:srgbClr val="FFF4E0"/>
+                </a:solidFill>
+                <a:latin typeface="Calibri"/>
               </a:rPr>
               <a:t>Cost · price · profit</a:t>
             </a:r>
@@ -8822,11 +8822,11 @@
             <a:avLst/>
           </a:prstGeom>
           <a:solidFill>
-            <a:srgbClr val="FBF6EC"/>
+            <a:srgbClr val="FFF4E0"/>
           </a:solidFill>
           <a:ln w="15875">
             <a:solidFill>
-              <a:srgbClr val="E2D8C4"/>
+              <a:srgbClr val="E0664A"/>
             </a:solidFill>
           </a:ln>
           <a:effectLst/>
@@ -8883,9 +8883,9 @@
             <a:r>
               <a:rPr sz="1200" b="1">
                 <a:solidFill>
-                  <a:srgbClr val="C07A1E"/>
-                </a:solidFill>
-                <a:latin typeface="Arial"/>
+                  <a:srgbClr val="2A8C82"/>
+                </a:solidFill>
+                <a:latin typeface="Calibri"/>
               </a:rPr>
               <a:t>POSTER ART · R-P11-ART · coming</a:t>
             </a:r>
@@ -8922,9 +8922,9 @@
             <a:r>
               <a:rPr sz="1800" b="1">
                 <a:solidFill>
-                  <a:srgbClr val="1F4D2B"/>
-                </a:solidFill>
-                <a:latin typeface="Georgia"/>
+                  <a:srgbClr val="2B2B2B"/>
+                </a:solidFill>
+                <a:latin typeface="Arial Rounded MT Bold"/>
               </a:rPr>
               <a:t>Artwork for R-P11 · One bunch: cost, price, profit</a:t>
             </a:r>
@@ -8961,9 +8961,9 @@
             <a:r>
               <a:rPr sz="1100" b="0">
                 <a:solidFill>
-                  <a:srgbClr val="20190F"/>
-                </a:solidFill>
-                <a:latin typeface="Arial"/>
+                  <a:srgbClr val="2B2B2B"/>
+                </a:solidFill>
+                <a:latin typeface="Calibri"/>
               </a:rPr>
               <a:t>Top half: ① a pile of generic notes and coins on the left ② a row of many spinach bunches on the right ③ a curved arrow that shares the money onto one single bunch, which now sits on a tiny coin stack. Bottom half: three steps like a staircase: ④ the bottom step — a bunch resting on a small coin stack (the floor) ⑤ the middle step — a market stall with…</a:t>
             </a:r>
@@ -8984,7 +8984,7 @@
     <p:bg>
       <p:bgPr>
         <a:solidFill>
-          <a:srgbClr val="F7F2E9"/>
+          <a:srgbClr val="FFF4E0"/>
         </a:solidFill>
         <a:effectLst/>
       </p:bgPr>
@@ -9026,9 +9026,9 @@
             <a:r>
               <a:rPr sz="1000" b="0">
                 <a:solidFill>
-                  <a:srgbClr val="6B6255"/>
-                </a:solidFill>
-                <a:latin typeface="Arial"/>
+                  <a:srgbClr val="2B2B2B"/>
+                </a:solidFill>
+                <a:latin typeface="Calibri"/>
               </a:rPr>
               <a:t>R-D2-18   ·   Poster R-P11</a:t>
             </a:r>
@@ -9065,9 +9065,9 @@
             <a:r>
               <a:rPr sz="1000" b="0">
                 <a:solidFill>
-                  <a:srgbClr val="6B6255"/>
-                </a:solidFill>
-                <a:latin typeface="Arial"/>
+                  <a:srgbClr val="2B2B2B"/>
+                </a:solidFill>
+                <a:latin typeface="Calibri"/>
               </a:rPr>
               <a:t>Farmer Money</a:t>
             </a:r>
@@ -9104,9 +9104,9 @@
             <a:r>
               <a:rPr sz="3800" b="1">
                 <a:solidFill>
-                  <a:srgbClr val="1F4D2B"/>
-                </a:solidFill>
-                <a:latin typeface="Georgia"/>
+                  <a:srgbClr val="2B2B2B"/>
+                </a:solidFill>
+                <a:latin typeface="Arial Rounded MT Bold"/>
               </a:rPr>
               <a:t>Cost of one bunch</a:t>
             </a:r>
@@ -9128,7 +9128,7 @@
             <a:avLst/>
           </a:prstGeom>
           <a:solidFill>
-            <a:srgbClr val="E2D8C4"/>
+            <a:srgbClr val="E0664A"/>
           </a:solidFill>
           <a:ln>
             <a:noFill/>
@@ -9187,9 +9187,9 @@
             <a:r>
               <a:rPr sz="2800" b="0">
                 <a:solidFill>
-                  <a:srgbClr val="20190F"/>
-                </a:solidFill>
-                <a:latin typeface="Arial"/>
+                  <a:srgbClr val="2B2B2B"/>
+                </a:solidFill>
+                <a:latin typeface="Calibri"/>
               </a:rPr>
               <a:t>•  All costs ÷ all bunches</a:t>
             </a:r>
@@ -9203,9 +9203,9 @@
             <a:r>
               <a:rPr sz="2800" b="0">
                 <a:solidFill>
-                  <a:srgbClr val="20190F"/>
-                </a:solidFill>
-                <a:latin typeface="Arial"/>
+                  <a:srgbClr val="2B2B2B"/>
+                </a:solidFill>
+                <a:latin typeface="Calibri"/>
               </a:rPr>
               <a:t>•  R510 ÷ 150 = R3.40</a:t>
             </a:r>
@@ -9219,9 +9219,9 @@
             <a:r>
               <a:rPr sz="2800" b="0">
                 <a:solidFill>
-                  <a:srgbClr val="20190F"/>
-                </a:solidFill>
-                <a:latin typeface="Arial"/>
+                  <a:srgbClr val="2B2B2B"/>
+                </a:solidFill>
+                <a:latin typeface="Calibri"/>
               </a:rPr>
               <a:t>•  Never sell below it</a:t>
             </a:r>
@@ -9243,11 +9243,11 @@
             <a:avLst/>
           </a:prstGeom>
           <a:solidFill>
-            <a:srgbClr val="FBF6EC"/>
+            <a:srgbClr val="FFF4E0"/>
           </a:solidFill>
           <a:ln w="15875">
             <a:solidFill>
-              <a:srgbClr val="E2D8C4"/>
+              <a:srgbClr val="E0664A"/>
             </a:solidFill>
           </a:ln>
           <a:effectLst/>
@@ -9304,9 +9304,9 @@
             <a:r>
               <a:rPr sz="1200" b="1">
                 <a:solidFill>
-                  <a:srgbClr val="C07A1E"/>
-                </a:solidFill>
-                <a:latin typeface="Arial"/>
+                  <a:srgbClr val="2A8C82"/>
+                </a:solidFill>
+                <a:latin typeface="Calibri"/>
               </a:rPr>
               <a:t>POSTER ART · R-P11-ART · coming</a:t>
             </a:r>
@@ -9343,9 +9343,9 @@
             <a:r>
               <a:rPr sz="1800" b="1">
                 <a:solidFill>
-                  <a:srgbClr val="1F4D2B"/>
-                </a:solidFill>
-                <a:latin typeface="Georgia"/>
+                  <a:srgbClr val="2B2B2B"/>
+                </a:solidFill>
+                <a:latin typeface="Arial Rounded MT Bold"/>
               </a:rPr>
               <a:t>Artwork for R-P11 · One bunch: cost, price, profit</a:t>
             </a:r>
@@ -9382,9 +9382,9 @@
             <a:r>
               <a:rPr sz="1100" b="0">
                 <a:solidFill>
-                  <a:srgbClr val="20190F"/>
-                </a:solidFill>
-                <a:latin typeface="Arial"/>
+                  <a:srgbClr val="2B2B2B"/>
+                </a:solidFill>
+                <a:latin typeface="Calibri"/>
               </a:rPr>
               <a:t>Top half: ① a pile of generic notes and coins on the left ② a row of many spinach bunches on the right ③ a curved arrow that shares the money onto one single bunch, which now sits on a tiny coin stack. Bottom half: three steps like a staircase: ④ the bottom step — a bunch resting on a small coin stack (the floor) ⑤ the middle step — a market stall with…</a:t>
             </a:r>
@@ -9405,7 +9405,7 @@
     <p:bg>
       <p:bgPr>
         <a:solidFill>
-          <a:srgbClr val="F7F2E9"/>
+          <a:srgbClr val="FFF4E0"/>
         </a:solidFill>
         <a:effectLst/>
       </p:bgPr>
@@ -9447,9 +9447,9 @@
             <a:r>
               <a:rPr sz="1000" b="0">
                 <a:solidFill>
-                  <a:srgbClr val="6B6255"/>
-                </a:solidFill>
-                <a:latin typeface="Arial"/>
+                  <a:srgbClr val="2B2B2B"/>
+                </a:solidFill>
+                <a:latin typeface="Calibri"/>
               </a:rPr>
               <a:t>R-D2-19   ·   Poster R-P11</a:t>
             </a:r>
@@ -9486,9 +9486,9 @@
             <a:r>
               <a:rPr sz="1000" b="0">
                 <a:solidFill>
-                  <a:srgbClr val="6B6255"/>
-                </a:solidFill>
-                <a:latin typeface="Arial"/>
+                  <a:srgbClr val="2B2B2B"/>
+                </a:solidFill>
+                <a:latin typeface="Calibri"/>
               </a:rPr>
               <a:t>Farmer Money</a:t>
             </a:r>
@@ -9525,9 +9525,9 @@
             <a:r>
               <a:rPr sz="3800" b="1">
                 <a:solidFill>
-                  <a:srgbClr val="1F4D2B"/>
-                </a:solidFill>
-                <a:latin typeface="Georgia"/>
+                  <a:srgbClr val="2B2B2B"/>
+                </a:solidFill>
+                <a:latin typeface="Arial Rounded MT Bold"/>
               </a:rPr>
               <a:t>A fair price, an honest profit</a:t>
             </a:r>
@@ -9549,7 +9549,7 @@
             <a:avLst/>
           </a:prstGeom>
           <a:solidFill>
-            <a:srgbClr val="E2D8C4"/>
+            <a:srgbClr val="E0664A"/>
           </a:solidFill>
           <a:ln>
             <a:noFill/>
@@ -9608,9 +9608,9 @@
             <a:r>
               <a:rPr sz="2800" b="0">
                 <a:solidFill>
-                  <a:srgbClr val="20190F"/>
-                </a:solidFill>
-                <a:latin typeface="Arial"/>
+                  <a:srgbClr val="2B2B2B"/>
+                </a:solidFill>
+                <a:latin typeface="Calibri"/>
               </a:rPr>
               <a:t>•  Floor · market · buyer</a:t>
             </a:r>
@@ -9624,9 +9624,9 @@
             <a:r>
               <a:rPr sz="2800" b="0">
                 <a:solidFill>
-                  <a:srgbClr val="20190F"/>
-                </a:solidFill>
-                <a:latin typeface="Arial"/>
+                  <a:srgbClr val="2B2B2B"/>
+                </a:solidFill>
+                <a:latin typeface="Calibri"/>
               </a:rPr>
               <a:t>•  R1 080 − R510 = R570</a:t>
             </a:r>
@@ -9640,9 +9640,9 @@
             <a:r>
               <a:rPr sz="2800" b="0">
                 <a:solidFill>
-                  <a:srgbClr val="20190F"/>
-                </a:solidFill>
-                <a:latin typeface="Arial"/>
+                  <a:srgbClr val="2B2B2B"/>
+                </a:solidFill>
+                <a:latin typeface="Calibri"/>
               </a:rPr>
               <a:t>•  Plus R480 of food</a:t>
             </a:r>
@@ -9664,11 +9664,11 @@
             <a:avLst/>
           </a:prstGeom>
           <a:solidFill>
-            <a:srgbClr val="FBF6EC"/>
+            <a:srgbClr val="FFF4E0"/>
           </a:solidFill>
           <a:ln w="15875">
             <a:solidFill>
-              <a:srgbClr val="E2D8C4"/>
+              <a:srgbClr val="E0664A"/>
             </a:solidFill>
           </a:ln>
           <a:effectLst/>
@@ -9725,9 +9725,9 @@
             <a:r>
               <a:rPr sz="1200" b="1">
                 <a:solidFill>
-                  <a:srgbClr val="C07A1E"/>
-                </a:solidFill>
-                <a:latin typeface="Arial"/>
+                  <a:srgbClr val="2A8C82"/>
+                </a:solidFill>
+                <a:latin typeface="Calibri"/>
               </a:rPr>
               <a:t>POSTER ART · R-P11-ART · coming</a:t>
             </a:r>
@@ -9764,9 +9764,9 @@
             <a:r>
               <a:rPr sz="1800" b="1">
                 <a:solidFill>
-                  <a:srgbClr val="1F4D2B"/>
-                </a:solidFill>
-                <a:latin typeface="Georgia"/>
+                  <a:srgbClr val="2B2B2B"/>
+                </a:solidFill>
+                <a:latin typeface="Arial Rounded MT Bold"/>
               </a:rPr>
               <a:t>Artwork for R-P11 · One bunch: cost, price, profit</a:t>
             </a:r>
@@ -9803,9 +9803,9 @@
             <a:r>
               <a:rPr sz="1100" b="0">
                 <a:solidFill>
-                  <a:srgbClr val="20190F"/>
-                </a:solidFill>
-                <a:latin typeface="Arial"/>
+                  <a:srgbClr val="2B2B2B"/>
+                </a:solidFill>
+                <a:latin typeface="Calibri"/>
               </a:rPr>
               <a:t>Top half: ① a pile of generic notes and coins on the left ② a row of many spinach bunches on the right ③ a curved arrow that shares the money onto one single bunch, which now sits on a tiny coin stack. Bottom half: three steps like a staircase: ④ the bottom step — a bunch resting on a small coin stack (the floor) ⑤ the middle step — a market stall with…</a:t>
             </a:r>
@@ -9826,7 +9826,7 @@
     <p:bg>
       <p:bgPr>
         <a:solidFill>
-          <a:srgbClr val="F7F2E9"/>
+          <a:srgbClr val="FFF4E0"/>
         </a:solidFill>
         <a:effectLst/>
       </p:bgPr>
@@ -9868,9 +9868,9 @@
             <a:r>
               <a:rPr sz="1000" b="0">
                 <a:solidFill>
-                  <a:srgbClr val="6B6255"/>
-                </a:solidFill>
-                <a:latin typeface="Arial"/>
+                  <a:srgbClr val="2B2B2B"/>
+                </a:solidFill>
+                <a:latin typeface="Calibri"/>
               </a:rPr>
               <a:t>R-D2-02   ·   Poster R-P08</a:t>
             </a:r>
@@ -9907,9 +9907,9 @@
             <a:r>
               <a:rPr sz="1000" b="0">
                 <a:solidFill>
-                  <a:srgbClr val="6B6255"/>
-                </a:solidFill>
-                <a:latin typeface="Arial"/>
+                  <a:srgbClr val="2B2B2B"/>
+                </a:solidFill>
+                <a:latin typeface="Calibri"/>
               </a:rPr>
               <a:t>Farmer Money</a:t>
             </a:r>
@@ -9946,9 +9946,9 @@
             <a:r>
               <a:rPr sz="3800" b="1">
                 <a:solidFill>
-                  <a:srgbClr val="1F4D2B"/>
-                </a:solidFill>
-                <a:latin typeface="Georgia"/>
+                  <a:srgbClr val="2B2B2B"/>
+                </a:solidFill>
+                <a:latin typeface="Arial Rounded MT Bold"/>
               </a:rPr>
               <a:t>Did Lerato make money?</a:t>
             </a:r>
@@ -9970,7 +9970,7 @@
             <a:avLst/>
           </a:prstGeom>
           <a:solidFill>
-            <a:srgbClr val="E2D8C4"/>
+            <a:srgbClr val="E0664A"/>
           </a:solidFill>
           <a:ln>
             <a:noFill/>
@@ -10029,9 +10029,9 @@
             <a:r>
               <a:rPr sz="2400" b="0">
                 <a:solidFill>
-                  <a:srgbClr val="20190F"/>
-                </a:solidFill>
-                <a:latin typeface="Arial"/>
+                  <a:srgbClr val="2B2B2B"/>
+                </a:solidFill>
+                <a:latin typeface="Calibri"/>
               </a:rPr>
               <a:t>•  Her farm tin has R315</a:t>
             </a:r>
@@ -10045,9 +10045,9 @@
             <a:r>
               <a:rPr sz="2400" b="0">
                 <a:solidFill>
-                  <a:srgbClr val="20190F"/>
-                </a:solidFill>
-                <a:latin typeface="Arial"/>
+                  <a:srgbClr val="2B2B2B"/>
+                </a:solidFill>
+                <a:latin typeface="Calibri"/>
               </a:rPr>
               <a:t>•  Did the garden make money?</a:t>
             </a:r>
@@ -10061,9 +10061,9 @@
             <a:r>
               <a:rPr sz="2400" b="0">
                 <a:solidFill>
-                  <a:srgbClr val="20190F"/>
-                </a:solidFill>
-                <a:latin typeface="Arial"/>
+                  <a:srgbClr val="2B2B2B"/>
+                </a:solidFill>
+                <a:latin typeface="Calibri"/>
               </a:rPr>
               <a:t>•  The tin can't tell. The book can.</a:t>
             </a:r>
@@ -10108,7 +10108,7 @@
     <p:bg>
       <p:bgPr>
         <a:solidFill>
-          <a:srgbClr val="F7F2E9"/>
+          <a:srgbClr val="FFF4E0"/>
         </a:solidFill>
         <a:effectLst/>
       </p:bgPr>
@@ -10150,9 +10150,9 @@
             <a:r>
               <a:rPr sz="1000" b="0">
                 <a:solidFill>
-                  <a:srgbClr val="6B6255"/>
-                </a:solidFill>
-                <a:latin typeface="Arial"/>
+                  <a:srgbClr val="2B2B2B"/>
+                </a:solidFill>
+                <a:latin typeface="Calibri"/>
               </a:rPr>
               <a:t>R-D2-20   ·   Poster R-P12</a:t>
             </a:r>
@@ -10189,9 +10189,9 @@
             <a:r>
               <a:rPr sz="1000" b="0">
                 <a:solidFill>
-                  <a:srgbClr val="6B6255"/>
-                </a:solidFill>
-                <a:latin typeface="Arial"/>
+                  <a:srgbClr val="2B2B2B"/>
+                </a:solidFill>
+                <a:latin typeface="Calibri"/>
               </a:rPr>
               <a:t>Farmer Money</a:t>
             </a:r>
@@ -10228,9 +10228,9 @@
             <a:r>
               <a:rPr sz="3800" b="1">
                 <a:solidFill>
-                  <a:srgbClr val="1F4D2B"/>
-                </a:solidFill>
-                <a:latin typeface="Georgia"/>
+                  <a:srgbClr val="2B2B2B"/>
+                </a:solidFill>
+                <a:latin typeface="Arial Rounded MT Bold"/>
               </a:rPr>
               <a:t>Fill the cup first</a:t>
             </a:r>
@@ -10252,7 +10252,7 @@
             <a:avLst/>
           </a:prstGeom>
           <a:solidFill>
-            <a:srgbClr val="E2D8C4"/>
+            <a:srgbClr val="E0664A"/>
           </a:solidFill>
           <a:ln>
             <a:noFill/>
@@ -10311,9 +10311,9 @@
             <a:r>
               <a:rPr sz="2800" b="0">
                 <a:solidFill>
-                  <a:srgbClr val="20190F"/>
-                </a:solidFill>
-                <a:latin typeface="Arial"/>
+                  <a:srgbClr val="2B2B2B"/>
+                </a:solidFill>
+                <a:latin typeface="Calibri"/>
               </a:rPr>
               <a:t>•  Season costs: R600 = 60 beans</a:t>
             </a:r>
@@ -10327,9 +10327,9 @@
             <a:r>
               <a:rPr sz="2800" b="0">
                 <a:solidFill>
-                  <a:srgbClr val="20190F"/>
-                </a:solidFill>
-                <a:latin typeface="Arial"/>
+                  <a:srgbClr val="2B2B2B"/>
+                </a:solidFill>
+                <a:latin typeface="Calibri"/>
               </a:rPr>
               <a:t>•  Each bunch leaves R10 = 1 bean</a:t>
             </a:r>
@@ -10343,9 +10343,9 @@
             <a:r>
               <a:rPr sz="2800" b="0">
                 <a:solidFill>
-                  <a:srgbClr val="20190F"/>
-                </a:solidFill>
-                <a:latin typeface="Arial"/>
+                  <a:srgbClr val="2B2B2B"/>
+                </a:solidFill>
+                <a:latin typeface="Calibri"/>
               </a:rPr>
               <a:t>•  60 bunches = break-even</a:t>
             </a:r>
@@ -10367,11 +10367,11 @@
             <a:avLst/>
           </a:prstGeom>
           <a:solidFill>
-            <a:srgbClr val="FBF6EC"/>
+            <a:srgbClr val="FFF4E0"/>
           </a:solidFill>
           <a:ln w="15875">
             <a:solidFill>
-              <a:srgbClr val="E2D8C4"/>
+              <a:srgbClr val="E0664A"/>
             </a:solidFill>
           </a:ln>
           <a:effectLst/>
@@ -10428,9 +10428,9 @@
             <a:r>
               <a:rPr sz="1200" b="1">
                 <a:solidFill>
-                  <a:srgbClr val="C07A1E"/>
-                </a:solidFill>
-                <a:latin typeface="Arial"/>
+                  <a:srgbClr val="2A8C82"/>
+                </a:solidFill>
+                <a:latin typeface="Calibri"/>
               </a:rPr>
               <a:t>POSTER ART · R-P12-ART · coming</a:t>
             </a:r>
@@ -10467,9 +10467,9 @@
             <a:r>
               <a:rPr sz="1800" b="1">
                 <a:solidFill>
-                  <a:srgbClr val="1F4D2B"/>
-                </a:solidFill>
-                <a:latin typeface="Georgia"/>
+                  <a:srgbClr val="2B2B2B"/>
+                </a:solidFill>
+                <a:latin typeface="Arial Rounded MT Bold"/>
               </a:rPr>
               <a:t>Artwork for R-P12 · Break-even with beans</a:t>
             </a:r>
@@ -10506,9 +10506,9 @@
             <a:r>
               <a:rPr sz="1100" b="0">
                 <a:solidFill>
-                  <a:srgbClr val="20190F"/>
-                </a:solidFill>
-                <a:latin typeface="Arial"/>
+                  <a:srgbClr val="2B2B2B"/>
+                </a:solidFill>
+                <a:latin typeface="Calibri"/>
               </a:rPr>
               <a:t>A big clay cup or tin in the centre, labelled only by a small icon of a fence, a watering can and a taxi on its side (the season's costs). ① The cup is almost full of beans. ② A line of spinach bunches walks towards the cup (drawn as a row); from each bunch drops **one bean** into the cup. ③ The cup is exactly full, with a small star at the rim. ④ Beyond…</a:t>
             </a:r>
@@ -10529,7 +10529,7 @@
     <p:bg>
       <p:bgPr>
         <a:solidFill>
-          <a:srgbClr val="F7F2E9"/>
+          <a:srgbClr val="FFF4E0"/>
         </a:solidFill>
         <a:effectLst/>
       </p:bgPr>
@@ -10571,9 +10571,9 @@
             <a:r>
               <a:rPr sz="1000" b="0">
                 <a:solidFill>
-                  <a:srgbClr val="6B6255"/>
-                </a:solidFill>
-                <a:latin typeface="Arial"/>
+                  <a:srgbClr val="2B2B2B"/>
+                </a:solidFill>
+                <a:latin typeface="Calibri"/>
               </a:rPr>
               <a:t>R-D2-21</a:t>
             </a:r>
@@ -10610,9 +10610,9 @@
             <a:r>
               <a:rPr sz="1000" b="0">
                 <a:solidFill>
-                  <a:srgbClr val="6B6255"/>
-                </a:solidFill>
-                <a:latin typeface="Arial"/>
+                  <a:srgbClr val="2B2B2B"/>
+                </a:solidFill>
+                <a:latin typeface="Calibri"/>
               </a:rPr>
               <a:t>Farmer Money</a:t>
             </a:r>
@@ -10634,7 +10634,7 @@
             <a:avLst/>
           </a:prstGeom>
           <a:solidFill>
-            <a:srgbClr val="C07A1E"/>
+            <a:srgbClr val="2A8C82"/>
           </a:solidFill>
           <a:ln>
             <a:noFill/>
@@ -10693,9 +10693,9 @@
             <a:r>
               <a:rPr sz="1400" b="1">
                 <a:solidFill>
-                  <a:srgbClr val="F7F2E9"/>
-                </a:solidFill>
-                <a:latin typeface="Arial"/>
+                  <a:srgbClr val="FFF4E0"/>
+                </a:solidFill>
+                <a:latin typeface="Calibri"/>
               </a:rPr>
               <a:t>YOUR TURN</a:t>
             </a:r>
@@ -10732,9 +10732,9 @@
             <a:r>
               <a:rPr sz="3800" b="1">
                 <a:solidFill>
-                  <a:srgbClr val="1F4D2B"/>
-                </a:solidFill>
-                <a:latin typeface="Georgia"/>
+                  <a:srgbClr val="2B2B2B"/>
+                </a:solidFill>
+                <a:latin typeface="Arial Rounded MT Bold"/>
               </a:rPr>
               <a:t>Break-even with beans</a:t>
             </a:r>
@@ -10756,7 +10756,7 @@
             <a:avLst/>
           </a:prstGeom>
           <a:solidFill>
-            <a:srgbClr val="E2D8C4"/>
+            <a:srgbClr val="E0664A"/>
           </a:solidFill>
           <a:ln>
             <a:noFill/>
@@ -10815,9 +10815,9 @@
             <a:r>
               <a:rPr sz="3000" b="1">
                 <a:solidFill>
-                  <a:srgbClr val="20190F"/>
-                </a:solidFill>
-                <a:latin typeface="Arial"/>
+                  <a:srgbClr val="2B2B2B"/>
+                </a:solidFill>
+                <a:latin typeface="Calibri"/>
               </a:rPr>
               <a:t>•  Drop one bean per bunch</a:t>
             </a:r>
@@ -10831,9 +10831,9 @@
             <a:r>
               <a:rPr sz="3000" b="1">
                 <a:solidFill>
-                  <a:srgbClr val="20190F"/>
-                </a:solidFill>
-                <a:latin typeface="Arial"/>
+                  <a:srgbClr val="2B2B2B"/>
+                </a:solidFill>
+                <a:latin typeface="Calibri"/>
               </a:rPr>
               <a:t>•  Count until the cup is full</a:t>
             </a:r>
@@ -10847,9 +10847,9 @@
             <a:r>
               <a:rPr sz="3000" b="1">
                 <a:solidFill>
-                  <a:srgbClr val="20190F"/>
-                </a:solidFill>
-                <a:latin typeface="Arial"/>
+                  <a:srgbClr val="2B2B2B"/>
+                </a:solidFill>
+                <a:latin typeface="Calibri"/>
               </a:rPr>
               <a:t>•  Try: price falls to R10 (15 min)</a:t>
             </a:r>
@@ -10870,7 +10870,7 @@
     <p:bg>
       <p:bgPr>
         <a:solidFill>
-          <a:srgbClr val="F7F2E9"/>
+          <a:srgbClr val="FFF4E0"/>
         </a:solidFill>
         <a:effectLst/>
       </p:bgPr>
@@ -10912,9 +10912,9 @@
             <a:r>
               <a:rPr sz="1000" b="0">
                 <a:solidFill>
-                  <a:srgbClr val="6B6255"/>
-                </a:solidFill>
-                <a:latin typeface="Arial"/>
+                  <a:srgbClr val="2B2B2B"/>
+                </a:solidFill>
+                <a:latin typeface="Calibri"/>
               </a:rPr>
               <a:t>R-D2-22   ·   Poster R-P13</a:t>
             </a:r>
@@ -10951,9 +10951,9 @@
             <a:r>
               <a:rPr sz="1000" b="0">
                 <a:solidFill>
-                  <a:srgbClr val="6B6255"/>
-                </a:solidFill>
-                <a:latin typeface="Arial"/>
+                  <a:srgbClr val="2B2B2B"/>
+                </a:solidFill>
+                <a:latin typeface="Calibri"/>
               </a:rPr>
               <a:t>Farmer Money</a:t>
             </a:r>
@@ -10990,9 +10990,9 @@
             <a:r>
               <a:rPr sz="3800" b="1">
                 <a:solidFill>
-                  <a:srgbClr val="1F4D2B"/>
-                </a:solidFill>
-                <a:latin typeface="Georgia"/>
+                  <a:srgbClr val="2B2B2B"/>
+                </a:solidFill>
+                <a:latin typeface="Arial Rounded MT Bold"/>
               </a:rPr>
               <a:t>Money through the season</a:t>
             </a:r>
@@ -11014,7 +11014,7 @@
             <a:avLst/>
           </a:prstGeom>
           <a:solidFill>
-            <a:srgbClr val="E2D8C4"/>
+            <a:srgbClr val="E0664A"/>
           </a:solidFill>
           <a:ln>
             <a:noFill/>
@@ -11073,9 +11073,9 @@
             <a:r>
               <a:rPr sz="2800" b="0">
                 <a:solidFill>
-                  <a:srgbClr val="20190F"/>
-                </a:solidFill>
-                <a:latin typeface="Arial"/>
+                  <a:srgbClr val="2B2B2B"/>
+                </a:solidFill>
+                <a:latin typeface="Calibri"/>
               </a:rPr>
               <a:t>•  Money out first</a:t>
             </a:r>
@@ -11089,9 +11089,9 @@
             <a:r>
               <a:rPr sz="2800" b="0">
                 <a:solidFill>
-                  <a:srgbClr val="20190F"/>
-                </a:solidFill>
-                <a:latin typeface="Arial"/>
+                  <a:srgbClr val="2B2B2B"/>
+                </a:solidFill>
+                <a:latin typeface="Calibri"/>
               </a:rPr>
               <a:t>•  Money in later</a:t>
             </a:r>
@@ -11105,9 +11105,9 @@
             <a:r>
               <a:rPr sz="2800" b="0">
                 <a:solidFill>
-                  <a:srgbClr val="20190F"/>
-                </a:solidFill>
-                <a:latin typeface="Arial"/>
+                  <a:srgbClr val="2B2B2B"/>
+                </a:solidFill>
+                <a:latin typeface="Calibri"/>
               </a:rPr>
               <a:t>•  Find the pinch month</a:t>
             </a:r>
@@ -11129,11 +11129,11 @@
             <a:avLst/>
           </a:prstGeom>
           <a:solidFill>
-            <a:srgbClr val="FBF6EC"/>
+            <a:srgbClr val="FFF4E0"/>
           </a:solidFill>
           <a:ln w="15875">
             <a:solidFill>
-              <a:srgbClr val="E2D8C4"/>
+              <a:srgbClr val="E0664A"/>
             </a:solidFill>
           </a:ln>
           <a:effectLst/>
@@ -11190,9 +11190,9 @@
             <a:r>
               <a:rPr sz="1200" b="1">
                 <a:solidFill>
-                  <a:srgbClr val="C07A1E"/>
-                </a:solidFill>
-                <a:latin typeface="Arial"/>
+                  <a:srgbClr val="2A8C82"/>
+                </a:solidFill>
+                <a:latin typeface="Calibri"/>
               </a:rPr>
               <a:t>ANIMATION · R-ANI-05 · coming</a:t>
             </a:r>
@@ -11229,9 +11229,9 @@
             <a:r>
               <a:rPr sz="1800" b="1">
                 <a:solidFill>
-                  <a:srgbClr val="1F4D2B"/>
-                </a:solidFill>
-                <a:latin typeface="Georgia"/>
+                  <a:srgbClr val="2B2B2B"/>
+                </a:solidFill>
+                <a:latin typeface="Arial Rounded MT Bold"/>
               </a:rPr>
               <a:t>The season tin</a:t>
             </a:r>
@@ -11268,9 +11268,9 @@
             <a:r>
               <a:rPr sz="1100" b="0">
                 <a:solidFill>
-                  <a:srgbClr val="20190F"/>
-                </a:solidFill>
-                <a:latin typeface="Arial"/>
+                  <a:srgbClr val="2B2B2B"/>
+                </a:solidFill>
+                <a:latin typeface="Calibri"/>
               </a:rPr>
               <a:t>One tin in the foreground, a garden in the background that changes through 12 months (2 s per month), starting in spring (September): sowing → seedlings → growth → full harvest → autumn planting → winter greens with frost cloth → dry late winter. The sun moves lower in the **northern** sky in winter. The coin level in the tin: falls in September (coins…</a:t>
             </a:r>
@@ -11291,7 +11291,7 @@
     <p:bg>
       <p:bgPr>
         <a:solidFill>
-          <a:srgbClr val="F7F2E9"/>
+          <a:srgbClr val="FFF4E0"/>
         </a:solidFill>
         <a:effectLst/>
       </p:bgPr>
@@ -11333,9 +11333,9 @@
             <a:r>
               <a:rPr sz="1000" b="0">
                 <a:solidFill>
-                  <a:srgbClr val="6B6255"/>
-                </a:solidFill>
-                <a:latin typeface="Arial"/>
+                  <a:srgbClr val="2B2B2B"/>
+                </a:solidFill>
+                <a:latin typeface="Calibri"/>
               </a:rPr>
               <a:t>R-D2-23</a:t>
             </a:r>
@@ -11372,9 +11372,9 @@
             <a:r>
               <a:rPr sz="1000" b="0">
                 <a:solidFill>
-                  <a:srgbClr val="6B6255"/>
-                </a:solidFill>
-                <a:latin typeface="Arial"/>
+                  <a:srgbClr val="2B2B2B"/>
+                </a:solidFill>
+                <a:latin typeface="Calibri"/>
               </a:rPr>
               <a:t>Farmer Money</a:t>
             </a:r>
@@ -11396,7 +11396,7 @@
             <a:avLst/>
           </a:prstGeom>
           <a:solidFill>
-            <a:srgbClr val="C07A1E"/>
+            <a:srgbClr val="2A8C82"/>
           </a:solidFill>
           <a:ln>
             <a:noFill/>
@@ -11455,9 +11455,9 @@
             <a:r>
               <a:rPr sz="1400" b="1">
                 <a:solidFill>
-                  <a:srgbClr val="F7F2E9"/>
-                </a:solidFill>
-                <a:latin typeface="Arial"/>
+                  <a:srgbClr val="FFF4E0"/>
+                </a:solidFill>
+                <a:latin typeface="Calibri"/>
               </a:rPr>
               <a:t>YOUR TURN</a:t>
             </a:r>
@@ -11494,9 +11494,9 @@
             <a:r>
               <a:rPr sz="3800" b="1">
                 <a:solidFill>
-                  <a:srgbClr val="1F4D2B"/>
-                </a:solidFill>
-                <a:latin typeface="Georgia"/>
+                  <a:srgbClr val="2B2B2B"/>
+                </a:solidFill>
+                <a:latin typeface="Arial Rounded MT Bold"/>
               </a:rPr>
               <a:t>The Dlamini farm tin</a:t>
             </a:r>
@@ -11518,7 +11518,7 @@
             <a:avLst/>
           </a:prstGeom>
           <a:solidFill>
-            <a:srgbClr val="E2D8C4"/>
+            <a:srgbClr val="E0664A"/>
           </a:solidFill>
           <a:ln>
             <a:noFill/>
@@ -11577,9 +11577,9 @@
             <a:r>
               <a:rPr sz="3000" b="1">
                 <a:solidFill>
-                  <a:srgbClr val="20190F"/>
-                </a:solidFill>
-                <a:latin typeface="Arial"/>
+                  <a:srgbClr val="2B2B2B"/>
+                </a:solidFill>
+                <a:latin typeface="Calibri"/>
               </a:rPr>
               <a:t>•  Start: R200 on 1 September</a:t>
             </a:r>
@@ -11593,9 +11593,9 @@
             <a:r>
               <a:rPr sz="3000" b="1">
                 <a:solidFill>
-                  <a:srgbClr val="20190F"/>
-                </a:solidFill>
-                <a:latin typeface="Arial"/>
+                  <a:srgbClr val="2B2B2B"/>
+                </a:solidFill>
+                <a:latin typeface="Calibri"/>
               </a:rPr>
               <a:t>•  Month by month, with play money</a:t>
             </a:r>
@@ -11609,9 +11609,9 @@
             <a:r>
               <a:rPr sz="3000" b="1">
                 <a:solidFill>
-                  <a:srgbClr val="20190F"/>
-                </a:solidFill>
-                <a:latin typeface="Arial"/>
+                  <a:srgbClr val="2B2B2B"/>
+                </a:solidFill>
+                <a:latin typeface="Calibri"/>
               </a:rPr>
               <a:t>•  Red when below zero (25 min)</a:t>
             </a:r>
@@ -11632,7 +11632,7 @@
     <p:bg>
       <p:bgPr>
         <a:solidFill>
-          <a:srgbClr val="F7F2E9"/>
+          <a:srgbClr val="FFF4E0"/>
         </a:solidFill>
         <a:effectLst/>
       </p:bgPr>
@@ -11674,9 +11674,9 @@
             <a:r>
               <a:rPr sz="1000" b="0">
                 <a:solidFill>
-                  <a:srgbClr val="6B6255"/>
-                </a:solidFill>
-                <a:latin typeface="Arial"/>
+                  <a:srgbClr val="2B2B2B"/>
+                </a:solidFill>
+                <a:latin typeface="Calibri"/>
               </a:rPr>
               <a:t>R-D2-24</a:t>
             </a:r>
@@ -11713,9 +11713,9 @@
             <a:r>
               <a:rPr sz="1000" b="0">
                 <a:solidFill>
-                  <a:srgbClr val="6B6255"/>
-                </a:solidFill>
-                <a:latin typeface="Arial"/>
+                  <a:srgbClr val="2B2B2B"/>
+                </a:solidFill>
+                <a:latin typeface="Calibri"/>
               </a:rPr>
               <a:t>Farmer Money</a:t>
             </a:r>
@@ -11737,7 +11737,7 @@
             <a:avLst/>
           </a:prstGeom>
           <a:solidFill>
-            <a:srgbClr val="235E86"/>
+            <a:srgbClr val="E0664A"/>
           </a:solidFill>
           <a:ln>
             <a:noFill/>
@@ -11796,9 +11796,9 @@
             <a:r>
               <a:rPr sz="1200" b="1">
                 <a:solidFill>
-                  <a:srgbClr val="F7F2E9"/>
-                </a:solidFill>
-                <a:latin typeface="Arial"/>
+                  <a:srgbClr val="FFF4E0"/>
+                </a:solidFill>
+                <a:latin typeface="Calibri"/>
               </a:rPr>
               <a:t>APP</a:t>
             </a:r>
@@ -11835,9 +11835,9 @@
             <a:r>
               <a:rPr sz="3800" b="1">
                 <a:solidFill>
-                  <a:srgbClr val="1F4D2B"/>
-                </a:solidFill>
-                <a:latin typeface="Georgia"/>
+                  <a:srgbClr val="2B2B2B"/>
+                </a:solidFill>
+                <a:latin typeface="Arial Rounded MT Bold"/>
               </a:rPr>
               <a:t>Financial sheet</a:t>
             </a:r>
@@ -11859,7 +11859,7 @@
             <a:avLst/>
           </a:prstGeom>
           <a:solidFill>
-            <a:srgbClr val="E2D8C4"/>
+            <a:srgbClr val="E0664A"/>
           </a:solidFill>
           <a:ln>
             <a:noFill/>
@@ -11918,9 +11918,9 @@
             <a:r>
               <a:rPr sz="2400" b="0">
                 <a:solidFill>
-                  <a:srgbClr val="20190F"/>
-                </a:solidFill>
-                <a:latin typeface="Arial"/>
+                  <a:srgbClr val="2B2B2B"/>
+                </a:solidFill>
+                <a:latin typeface="Calibri"/>
               </a:rPr>
               <a:t>•  My Records → Financial sheet</a:t>
             </a:r>
@@ -11934,9 +11934,9 @@
             <a:r>
               <a:rPr sz="2400" b="0">
                 <a:solidFill>
-                  <a:srgbClr val="20190F"/>
-                </a:solidFill>
-                <a:latin typeface="Arial"/>
+                  <a:srgbClr val="2B2B2B"/>
+                </a:solidFill>
+                <a:latin typeface="Calibri"/>
               </a:rPr>
               <a:t>•  Month: Income · Expenses</a:t>
             </a:r>
@@ -11950,9 +11950,9 @@
             <a:r>
               <a:rPr sz="2400" b="0">
                 <a:solidFill>
-                  <a:srgbClr val="20190F"/>
-                </a:solidFill>
-                <a:latin typeface="Arial"/>
+                  <a:srgbClr val="2B2B2B"/>
+                </a:solidFill>
+                <a:latin typeface="Calibri"/>
               </a:rPr>
               <a:t>•  Recorded cash margin ≠ season profit</a:t>
             </a:r>
@@ -11997,7 +11997,7 @@
     <p:bg>
       <p:bgPr>
         <a:solidFill>
-          <a:srgbClr val="F7F2E9"/>
+          <a:srgbClr val="FFF4E0"/>
         </a:solidFill>
         <a:effectLst/>
       </p:bgPr>
@@ -12039,9 +12039,9 @@
             <a:r>
               <a:rPr sz="1000" b="0">
                 <a:solidFill>
-                  <a:srgbClr val="6B6255"/>
-                </a:solidFill>
-                <a:latin typeface="Arial"/>
+                  <a:srgbClr val="2B2B2B"/>
+                </a:solidFill>
+                <a:latin typeface="Calibri"/>
               </a:rPr>
               <a:t>R-D2-25</a:t>
             </a:r>
@@ -12078,9 +12078,9 @@
             <a:r>
               <a:rPr sz="1000" b="0">
                 <a:solidFill>
-                  <a:srgbClr val="6B6255"/>
-                </a:solidFill>
-                <a:latin typeface="Arial"/>
+                  <a:srgbClr val="2B2B2B"/>
+                </a:solidFill>
+                <a:latin typeface="Calibri"/>
               </a:rPr>
               <a:t>Farmer Money</a:t>
             </a:r>
@@ -12117,9 +12117,9 @@
             <a:r>
               <a:rPr sz="3800" b="1">
                 <a:solidFill>
-                  <a:srgbClr val="1F4D2B"/>
-                </a:solidFill>
-                <a:latin typeface="Georgia"/>
+                  <a:srgbClr val="2B2B2B"/>
+                </a:solidFill>
+                <a:latin typeface="Arial Rounded MT Bold"/>
               </a:rPr>
               <a:t>Month-end check</a:t>
             </a:r>
@@ -12141,7 +12141,7 @@
             <a:avLst/>
           </a:prstGeom>
           <a:solidFill>
-            <a:srgbClr val="E2D8C4"/>
+            <a:srgbClr val="E0664A"/>
           </a:solidFill>
           <a:ln>
             <a:noFill/>
@@ -12200,9 +12200,9 @@
             <a:r>
               <a:rPr sz="2800" b="0">
                 <a:solidFill>
-                  <a:srgbClr val="20190F"/>
-                </a:solidFill>
-                <a:latin typeface="Arial"/>
+                  <a:srgbClr val="2B2B2B"/>
+                </a:solidFill>
+                <a:latin typeface="Calibri"/>
               </a:rPr>
               <a:t>•  In · out · balance · tin count</a:t>
             </a:r>
@@ -12216,9 +12216,9 @@
             <a:r>
               <a:rPr sz="2800" b="0">
                 <a:solidFill>
-                  <a:srgbClr val="20190F"/>
-                </a:solidFill>
-                <a:latin typeface="Arial"/>
+                  <a:srgbClr val="2B2B2B"/>
+                </a:solidFill>
+                <a:latin typeface="Calibri"/>
               </a:rPr>
               <a:t>•  Owed to me · I owe</a:t>
             </a:r>
@@ -12232,9 +12232,9 @@
             <a:r>
               <a:rPr sz="2800" b="0">
                 <a:solidFill>
-                  <a:srgbClr val="20190F"/>
-                </a:solidFill>
-                <a:latin typeface="Arial"/>
+                  <a:srgbClr val="2B2B2B"/>
+                </a:solidFill>
+                <a:latin typeface="Calibri"/>
               </a:rPr>
               <a:t>•  Taken home</a:t>
             </a:r>
@@ -12256,11 +12256,11 @@
             <a:avLst/>
           </a:prstGeom>
           <a:solidFill>
-            <a:srgbClr val="FBF6EC"/>
+            <a:srgbClr val="FFF4E0"/>
           </a:solidFill>
           <a:ln w="15875">
             <a:solidFill>
-              <a:srgbClr val="E2D8C4"/>
+              <a:srgbClr val="E0664A"/>
             </a:solidFill>
           </a:ln>
           <a:effectLst/>
@@ -12317,9 +12317,9 @@
             <a:r>
               <a:rPr sz="1200" b="1">
                 <a:solidFill>
-                  <a:srgbClr val="C07A1E"/>
-                </a:solidFill>
-                <a:latin typeface="Arial"/>
+                  <a:srgbClr val="2A8C82"/>
+                </a:solidFill>
+                <a:latin typeface="Calibri"/>
               </a:rPr>
               <a:t>PHOTO · R-PHO-01 · coming</a:t>
             </a:r>
@@ -12356,9 +12356,9 @@
             <a:r>
               <a:rPr sz="1800" b="1">
                 <a:solidFill>
-                  <a:srgbClr val="1F4D2B"/>
-                </a:solidFill>
-                <a:latin typeface="Georgia"/>
+                  <a:srgbClr val="2B2B2B"/>
+                </a:solidFill>
+                <a:latin typeface="Arial Rounded MT Bold"/>
               </a:rPr>
               <a:t>A real money book page and tin</a:t>
             </a:r>
@@ -12395,9 +12395,9 @@
             <a:r>
               <a:rPr sz="1100" b="0">
                 <a:solidFill>
-                  <a:srgbClr val="20190F"/>
-                </a:solidFill>
-                <a:latin typeface="Arial"/>
+                  <a:srgbClr val="2B2B2B"/>
+                </a:solidFill>
+                <a:latin typeface="Calibri"/>
               </a:rPr>
               <a:t>Real photograph, taken by the programme on Day 0: the course money book (P1) open on a wooden table, filled in by hand with **Lerato's week** (made-up data — never a learner's real book), a pencil, and a tin with its lid off showing play money. Daylight, from above, no faces. 1920 × 1080.</a:t>
             </a:r>
@@ -12418,7 +12418,7 @@
     <p:bg>
       <p:bgPr>
         <a:solidFill>
-          <a:srgbClr val="F7F2E9"/>
+          <a:srgbClr val="FFF4E0"/>
         </a:solidFill>
         <a:effectLst/>
       </p:bgPr>
@@ -12460,9 +12460,9 @@
             <a:r>
               <a:rPr sz="1000" b="0">
                 <a:solidFill>
-                  <a:srgbClr val="6B6255"/>
-                </a:solidFill>
-                <a:latin typeface="Arial"/>
+                  <a:srgbClr val="2B2B2B"/>
+                </a:solidFill>
+                <a:latin typeface="Calibri"/>
               </a:rPr>
               <a:t>R-D2-26   ·   Poster R-P08</a:t>
             </a:r>
@@ -12499,9 +12499,9 @@
             <a:r>
               <a:rPr sz="1000" b="0">
                 <a:solidFill>
-                  <a:srgbClr val="6B6255"/>
-                </a:solidFill>
-                <a:latin typeface="Arial"/>
+                  <a:srgbClr val="2B2B2B"/>
+                </a:solidFill>
+                <a:latin typeface="Calibri"/>
               </a:rPr>
               <a:t>Farmer Money</a:t>
             </a:r>
@@ -12538,9 +12538,9 @@
             <a:r>
               <a:rPr sz="3800" b="1">
                 <a:solidFill>
-                  <a:srgbClr val="1F4D2B"/>
-                </a:solidFill>
-                <a:latin typeface="Georgia"/>
+                  <a:srgbClr val="2B2B2B"/>
+                </a:solidFill>
+                <a:latin typeface="Arial Rounded MT Bold"/>
               </a:rPr>
               <a:t>Take home</a:t>
             </a:r>
@@ -12562,7 +12562,7 @@
             <a:avLst/>
           </a:prstGeom>
           <a:solidFill>
-            <a:srgbClr val="E2D8C4"/>
+            <a:srgbClr val="E0664A"/>
           </a:solidFill>
           <a:ln>
             <a:noFill/>
@@ -12621,9 +12621,9 @@
             <a:r>
               <a:rPr sz="2400" b="0">
                 <a:solidFill>
-                  <a:srgbClr val="20190F"/>
-                </a:solidFill>
-                <a:latin typeface="Arial"/>
+                  <a:srgbClr val="2B2B2B"/>
+                </a:solidFill>
+                <a:latin typeface="Calibri"/>
               </a:rPr>
               <a:t>•  Write every farm rand for 7 days</a:t>
             </a:r>
@@ -12637,9 +12637,9 @@
             <a:r>
               <a:rPr sz="2400" b="0">
                 <a:solidFill>
-                  <a:srgbClr val="20190F"/>
-                </a:solidFill>
-                <a:latin typeface="Arial"/>
+                  <a:srgbClr val="2B2B2B"/>
+                </a:solidFill>
+                <a:latin typeface="Calibri"/>
               </a:rPr>
               <a:t>•  Price check: one bunch, one other</a:t>
             </a:r>
@@ -12653,9 +12653,9 @@
             <a:r>
               <a:rPr sz="2400" b="0">
                 <a:solidFill>
-                  <a:srgbClr val="20190F"/>
-                </a:solidFill>
-                <a:latin typeface="Arial"/>
+                  <a:srgbClr val="2B2B2B"/>
+                </a:solidFill>
+                <a:latin typeface="Calibri"/>
               </a:rPr>
               <a:t>•  Money back: count it all</a:t>
             </a:r>
@@ -12677,11 +12677,11 @@
             <a:avLst/>
           </a:prstGeom>
           <a:solidFill>
-            <a:srgbClr val="FBF6EC"/>
+            <a:srgbClr val="FFF4E0"/>
           </a:solidFill>
           <a:ln w="15875">
             <a:solidFill>
-              <a:srgbClr val="E2D8C4"/>
+              <a:srgbClr val="E0664A"/>
             </a:solidFill>
           </a:ln>
           <a:effectLst/>
@@ -12738,9 +12738,9 @@
             <a:r>
               <a:rPr sz="1200" b="1">
                 <a:solidFill>
-                  <a:srgbClr val="C07A1E"/>
-                </a:solidFill>
-                <a:latin typeface="Arial"/>
+                  <a:srgbClr val="2A8C82"/>
+                </a:solidFill>
+                <a:latin typeface="Calibri"/>
               </a:rPr>
               <a:t>POSTER ART · R-P08-ART · coming</a:t>
             </a:r>
@@ -12777,9 +12777,9 @@
             <a:r>
               <a:rPr sz="1800" b="1">
                 <a:solidFill>
-                  <a:srgbClr val="1F4D2B"/>
-                </a:solidFill>
-                <a:latin typeface="Georgia"/>
+                  <a:srgbClr val="2B2B2B"/>
+                </a:solidFill>
+                <a:latin typeface="Arial Rounded MT Bold"/>
               </a:rPr>
               <a:t>Artwork for R-P08 · The money book</a:t>
             </a:r>
@@ -12816,9 +12816,9 @@
             <a:r>
               <a:rPr sz="1100" b="0">
                 <a:solidFill>
-                  <a:srgbClr val="20190F"/>
-                </a:solidFill>
-                <a:latin typeface="Arial"/>
+                  <a:srgbClr val="2B2B2B"/>
+                </a:solidFill>
+                <a:latin typeface="Calibri"/>
               </a:rPr>
               <a:t>A large open exercise book, seen from above, on a wooden table. The left page has a grid of five columns; the column heads are **icons only**: ① a small calendar ② a leaf and a taxi (what happened) ③ a coin with an arrow going in ④ a coin with an arrow going out ⑤ a tin. Rows have scribble marks, not numbers. ⑥ The right page is a separate list with a…</a:t>
             </a:r>
@@ -12839,7 +12839,7 @@
     <p:bg>
       <p:bgPr>
         <a:solidFill>
-          <a:srgbClr val="F7F2E9"/>
+          <a:srgbClr val="FFF4E0"/>
         </a:solidFill>
         <a:effectLst/>
       </p:bgPr>
@@ -12881,9 +12881,9 @@
             <a:r>
               <a:rPr sz="1000" b="0">
                 <a:solidFill>
-                  <a:srgbClr val="6B6255"/>
-                </a:solidFill>
-                <a:latin typeface="Arial"/>
+                  <a:srgbClr val="2B2B2B"/>
+                </a:solidFill>
+                <a:latin typeface="Calibri"/>
               </a:rPr>
               <a:t>R-D2-03   ·   Poster R-P08</a:t>
             </a:r>
@@ -12920,9 +12920,9 @@
             <a:r>
               <a:rPr sz="1000" b="0">
                 <a:solidFill>
-                  <a:srgbClr val="6B6255"/>
-                </a:solidFill>
-                <a:latin typeface="Arial"/>
+                  <a:srgbClr val="2B2B2B"/>
+                </a:solidFill>
+                <a:latin typeface="Calibri"/>
               </a:rPr>
               <a:t>Farmer Money</a:t>
             </a:r>
@@ -12959,9 +12959,9 @@
             <a:r>
               <a:rPr sz="3800" b="1">
                 <a:solidFill>
-                  <a:srgbClr val="1F4D2B"/>
-                </a:solidFill>
-                <a:latin typeface="Georgia"/>
+                  <a:srgbClr val="2B2B2B"/>
+                </a:solidFill>
+                <a:latin typeface="Arial Rounded MT Bold"/>
               </a:rPr>
               <a:t>Write every rand</a:t>
             </a:r>
@@ -12983,7 +12983,7 @@
             <a:avLst/>
           </a:prstGeom>
           <a:solidFill>
-            <a:srgbClr val="E2D8C4"/>
+            <a:srgbClr val="E0664A"/>
           </a:solidFill>
           <a:ln>
             <a:noFill/>
@@ -13042,9 +13042,9 @@
             <a:r>
               <a:rPr sz="2800" b="0">
                 <a:solidFill>
-                  <a:srgbClr val="20190F"/>
-                </a:solidFill>
-                <a:latin typeface="Arial"/>
+                  <a:srgbClr val="2B2B2B"/>
+                </a:solidFill>
+                <a:latin typeface="Calibri"/>
               </a:rPr>
               <a:t>•  Date · what · in · out</a:t>
             </a:r>
@@ -13058,9 +13058,9 @@
             <a:r>
               <a:rPr sz="2800" b="0">
                 <a:solidFill>
-                  <a:srgbClr val="20190F"/>
-                </a:solidFill>
-                <a:latin typeface="Arial"/>
+                  <a:srgbClr val="2B2B2B"/>
+                </a:solidFill>
+                <a:latin typeface="Calibri"/>
               </a:rPr>
               <a:t>•  Balance = what's in the tin</a:t>
             </a:r>
@@ -13074,9 +13074,9 @@
             <a:r>
               <a:rPr sz="2800" b="0">
                 <a:solidFill>
-                  <a:srgbClr val="20190F"/>
-                </a:solidFill>
-                <a:latin typeface="Arial"/>
+                  <a:srgbClr val="2B2B2B"/>
+                </a:solidFill>
+                <a:latin typeface="Calibri"/>
               </a:rPr>
               <a:t>•  Owed to me: a separate page</a:t>
             </a:r>
@@ -13098,11 +13098,11 @@
             <a:avLst/>
           </a:prstGeom>
           <a:solidFill>
-            <a:srgbClr val="FBF6EC"/>
+            <a:srgbClr val="FFF4E0"/>
           </a:solidFill>
           <a:ln w="15875">
             <a:solidFill>
-              <a:srgbClr val="E2D8C4"/>
+              <a:srgbClr val="E0664A"/>
             </a:solidFill>
           </a:ln>
           <a:effectLst/>
@@ -13159,9 +13159,9 @@
             <a:r>
               <a:rPr sz="1200" b="1">
                 <a:solidFill>
-                  <a:srgbClr val="C07A1E"/>
-                </a:solidFill>
-                <a:latin typeface="Arial"/>
+                  <a:srgbClr val="2A8C82"/>
+                </a:solidFill>
+                <a:latin typeface="Calibri"/>
               </a:rPr>
               <a:t>POSTER ART · R-P08-ART · coming</a:t>
             </a:r>
@@ -13198,9 +13198,9 @@
             <a:r>
               <a:rPr sz="1800" b="1">
                 <a:solidFill>
-                  <a:srgbClr val="1F4D2B"/>
-                </a:solidFill>
-                <a:latin typeface="Georgia"/>
+                  <a:srgbClr val="2B2B2B"/>
+                </a:solidFill>
+                <a:latin typeface="Arial Rounded MT Bold"/>
               </a:rPr>
               <a:t>Artwork for R-P08 · The money book</a:t>
             </a:r>
@@ -13237,9 +13237,9 @@
             <a:r>
               <a:rPr sz="1100" b="0">
                 <a:solidFill>
-                  <a:srgbClr val="20190F"/>
-                </a:solidFill>
-                <a:latin typeface="Arial"/>
+                  <a:srgbClr val="2B2B2B"/>
+                </a:solidFill>
+                <a:latin typeface="Calibri"/>
               </a:rPr>
               <a:t>A large open exercise book, seen from above, on a wooden table. The left page has a grid of five columns; the column heads are **icons only**: ① a small calendar ② a leaf and a taxi (what happened) ③ a coin with an arrow going in ④ a coin with an arrow going out ⑤ a tin. Rows have scribble marks, not numbers. ⑥ The right page is a separate list with a…</a:t>
             </a:r>
@@ -13260,7 +13260,7 @@
     <p:bg>
       <p:bgPr>
         <a:solidFill>
-          <a:srgbClr val="F7F2E9"/>
+          <a:srgbClr val="FFF4E0"/>
         </a:solidFill>
         <a:effectLst/>
       </p:bgPr>
@@ -13302,9 +13302,9 @@
             <a:r>
               <a:rPr sz="1000" b="0">
                 <a:solidFill>
-                  <a:srgbClr val="6B6255"/>
-                </a:solidFill>
-                <a:latin typeface="Arial"/>
+                  <a:srgbClr val="2B2B2B"/>
+                </a:solidFill>
+                <a:latin typeface="Calibri"/>
               </a:rPr>
               <a:t>R-D2-04</a:t>
             </a:r>
@@ -13341,9 +13341,9 @@
             <a:r>
               <a:rPr sz="1000" b="0">
                 <a:solidFill>
-                  <a:srgbClr val="6B6255"/>
-                </a:solidFill>
-                <a:latin typeface="Arial"/>
+                  <a:srgbClr val="2B2B2B"/>
+                </a:solidFill>
+                <a:latin typeface="Calibri"/>
               </a:rPr>
               <a:t>Farmer Money</a:t>
             </a:r>
@@ -13365,7 +13365,7 @@
             <a:avLst/>
           </a:prstGeom>
           <a:solidFill>
-            <a:srgbClr val="C07A1E"/>
+            <a:srgbClr val="2A8C82"/>
           </a:solidFill>
           <a:ln>
             <a:noFill/>
@@ -13424,9 +13424,9 @@
             <a:r>
               <a:rPr sz="1400" b="1">
                 <a:solidFill>
-                  <a:srgbClr val="F7F2E9"/>
-                </a:solidFill>
-                <a:latin typeface="Arial"/>
+                  <a:srgbClr val="FFF4E0"/>
+                </a:solidFill>
+                <a:latin typeface="Calibri"/>
               </a:rPr>
               <a:t>YOUR TURN</a:t>
             </a:r>
@@ -13463,9 +13463,9 @@
             <a:r>
               <a:rPr sz="3800" b="1">
                 <a:solidFill>
-                  <a:srgbClr val="1F4D2B"/>
-                </a:solidFill>
-                <a:latin typeface="Georgia"/>
+                  <a:srgbClr val="2B2B2B"/>
+                </a:solidFill>
+                <a:latin typeface="Arial Rounded MT Bold"/>
               </a:rPr>
               <a:t>Lerato's week</a:t>
             </a:r>
@@ -13487,7 +13487,7 @@
             <a:avLst/>
           </a:prstGeom>
           <a:solidFill>
-            <a:srgbClr val="E2D8C4"/>
+            <a:srgbClr val="E0664A"/>
           </a:solidFill>
           <a:ln>
             <a:noFill/>
@@ -13546,9 +13546,9 @@
             <a:r>
               <a:rPr sz="2600" b="1">
                 <a:solidFill>
-                  <a:srgbClr val="20190F"/>
-                </a:solidFill>
-                <a:latin typeface="Arial"/>
+                  <a:srgbClr val="2B2B2B"/>
+                </a:solidFill>
+                <a:latin typeface="Calibri"/>
               </a:rPr>
               <a:t>•  Opening balance R150</a:t>
             </a:r>
@@ -13562,9 +13562,9 @@
             <a:r>
               <a:rPr sz="2600" b="1">
                 <a:solidFill>
-                  <a:srgbClr val="20190F"/>
-                </a:solidFill>
-                <a:latin typeface="Arial"/>
+                  <a:srgbClr val="2B2B2B"/>
+                </a:solidFill>
+                <a:latin typeface="Calibri"/>
               </a:rPr>
               <a:t>•  10 cards: move money, write a line</a:t>
             </a:r>
@@ -13578,9 +13578,9 @@
             <a:r>
               <a:rPr sz="2600" b="1">
                 <a:solidFill>
-                  <a:srgbClr val="20190F"/>
-                </a:solidFill>
-                <a:latin typeface="Arial"/>
+                  <a:srgbClr val="2B2B2B"/>
+                </a:solidFill>
+                <a:latin typeface="Calibri"/>
               </a:rPr>
               <a:t>•  Cards 3, 9: money moves? (20 min)</a:t>
             </a:r>
@@ -13602,11 +13602,11 @@
             <a:avLst/>
           </a:prstGeom>
           <a:solidFill>
-            <a:srgbClr val="FBF6EC"/>
+            <a:srgbClr val="FFF4E0"/>
           </a:solidFill>
           <a:ln w="15875">
             <a:solidFill>
-              <a:srgbClr val="E2D8C4"/>
+              <a:srgbClr val="E0664A"/>
             </a:solidFill>
           </a:ln>
           <a:effectLst/>
@@ -13663,9 +13663,9 @@
             <a:r>
               <a:rPr sz="1200" b="1">
                 <a:solidFill>
-                  <a:srgbClr val="C07A1E"/>
-                </a:solidFill>
-                <a:latin typeface="Arial"/>
+                  <a:srgbClr val="2A8C82"/>
+                </a:solidFill>
+                <a:latin typeface="Calibri"/>
               </a:rPr>
               <a:t>IMAGE · R-IMG-03 · coming</a:t>
             </a:r>
@@ -13702,9 +13702,9 @@
             <a:r>
               <a:rPr sz="1800" b="1">
                 <a:solidFill>
-                  <a:srgbClr val="1F4D2B"/>
-                </a:solidFill>
-                <a:latin typeface="Georgia"/>
+                  <a:srgbClr val="2B2B2B"/>
+                </a:solidFill>
+                <a:latin typeface="Arial Rounded MT Bold"/>
               </a:rPr>
               <a:t>Play money artwork</a:t>
             </a:r>
@@ -13741,9 +13741,9 @@
             <a:r>
               <a:rPr sz="1100" b="0">
                 <a:solidFill>
-                  <a:srgbClr val="20190F"/>
-                </a:solidFill>
-                <a:latin typeface="Arial"/>
+                  <a:srgbClr val="2B2B2B"/>
+                </a:solidFill>
+                <a:latin typeface="Calibri"/>
               </a:rPr>
               <a:t>Artwork for printed **play money** notes and coins. Notes 120 × 60 mm (clearly smaller than real notes, which must not be copied), coins 30 mm circles. Each note: Paper background, a big plain oval on the left with a simple **crop** drawing (R10 = a bean pod, R20 = a spinach leaf, R50 = a cabbage, R100 = a maize cob), a thick colour band down the right…</a:t>
             </a:r>
@@ -13764,7 +13764,7 @@
     <p:bg>
       <p:bgPr>
         <a:solidFill>
-          <a:srgbClr val="F7F2E9"/>
+          <a:srgbClr val="FFF4E0"/>
         </a:solidFill>
         <a:effectLst/>
       </p:bgPr>
@@ -13806,9 +13806,9 @@
             <a:r>
               <a:rPr sz="1000" b="0">
                 <a:solidFill>
-                  <a:srgbClr val="6B6255"/>
-                </a:solidFill>
-                <a:latin typeface="Arial"/>
+                  <a:srgbClr val="2B2B2B"/>
+                </a:solidFill>
+                <a:latin typeface="Calibri"/>
               </a:rPr>
               <a:t>R-D2-05   ·   Poster R-P08</a:t>
             </a:r>
@@ -13845,9 +13845,9 @@
             <a:r>
               <a:rPr sz="1000" b="0">
                 <a:solidFill>
-                  <a:srgbClr val="6B6255"/>
-                </a:solidFill>
-                <a:latin typeface="Arial"/>
+                  <a:srgbClr val="2B2B2B"/>
+                </a:solidFill>
+                <a:latin typeface="Calibri"/>
               </a:rPr>
               <a:t>Farmer Money</a:t>
             </a:r>
@@ -13884,9 +13884,9 @@
             <a:r>
               <a:rPr sz="3800" b="1">
                 <a:solidFill>
-                  <a:srgbClr val="1F4D2B"/>
-                </a:solidFill>
-                <a:latin typeface="Georgia"/>
+                  <a:srgbClr val="2B2B2B"/>
+                </a:solidFill>
+                <a:latin typeface="Arial Rounded MT Bold"/>
               </a:rPr>
               <a:t>Reconcile</a:t>
             </a:r>
@@ -13908,7 +13908,7 @@
             <a:avLst/>
           </a:prstGeom>
           <a:solidFill>
-            <a:srgbClr val="E2D8C4"/>
+            <a:srgbClr val="E0664A"/>
           </a:solidFill>
           <a:ln>
             <a:noFill/>
@@ -13967,9 +13967,9 @@
             <a:r>
               <a:rPr sz="2800" b="0">
                 <a:solidFill>
-                  <a:srgbClr val="20190F"/>
-                </a:solidFill>
-                <a:latin typeface="Arial"/>
+                  <a:srgbClr val="2B2B2B"/>
+                </a:solidFill>
+                <a:latin typeface="Calibri"/>
               </a:rPr>
               <a:t>•  Count the tin</a:t>
             </a:r>
@@ -13983,9 +13983,9 @@
             <a:r>
               <a:rPr sz="2800" b="0">
                 <a:solidFill>
-                  <a:srgbClr val="20190F"/>
-                </a:solidFill>
-                <a:latin typeface="Arial"/>
+                  <a:srgbClr val="2B2B2B"/>
+                </a:solidFill>
+                <a:latin typeface="Calibri"/>
               </a:rPr>
               <a:t>•  Does it match the book?</a:t>
             </a:r>
@@ -13999,9 +13999,9 @@
             <a:r>
               <a:rPr sz="2800" b="0">
                 <a:solidFill>
-                  <a:srgbClr val="20190F"/>
-                </a:solidFill>
-                <a:latin typeface="Arial"/>
+                  <a:srgbClr val="2B2B2B"/>
+                </a:solidFill>
+                <a:latin typeface="Calibri"/>
               </a:rPr>
               <a:t>•  No? Find the line.</a:t>
             </a:r>
@@ -14023,11 +14023,11 @@
             <a:avLst/>
           </a:prstGeom>
           <a:solidFill>
-            <a:srgbClr val="FBF6EC"/>
+            <a:srgbClr val="FFF4E0"/>
           </a:solidFill>
           <a:ln w="15875">
             <a:solidFill>
-              <a:srgbClr val="E2D8C4"/>
+              <a:srgbClr val="E0664A"/>
             </a:solidFill>
           </a:ln>
           <a:effectLst/>
@@ -14084,9 +14084,9 @@
             <a:r>
               <a:rPr sz="1200" b="1">
                 <a:solidFill>
-                  <a:srgbClr val="C07A1E"/>
-                </a:solidFill>
-                <a:latin typeface="Arial"/>
+                  <a:srgbClr val="2A8C82"/>
+                </a:solidFill>
+                <a:latin typeface="Calibri"/>
               </a:rPr>
               <a:t>POSTER ART · R-P08-ART · coming</a:t>
             </a:r>
@@ -14123,9 +14123,9 @@
             <a:r>
               <a:rPr sz="1800" b="1">
                 <a:solidFill>
-                  <a:srgbClr val="1F4D2B"/>
-                </a:solidFill>
-                <a:latin typeface="Georgia"/>
+                  <a:srgbClr val="2B2B2B"/>
+                </a:solidFill>
+                <a:latin typeface="Arial Rounded MT Bold"/>
               </a:rPr>
               <a:t>Artwork for R-P08 · The money book</a:t>
             </a:r>
@@ -14162,9 +14162,9 @@
             <a:r>
               <a:rPr sz="1100" b="0">
                 <a:solidFill>
-                  <a:srgbClr val="20190F"/>
-                </a:solidFill>
-                <a:latin typeface="Arial"/>
+                  <a:srgbClr val="2B2B2B"/>
+                </a:solidFill>
+                <a:latin typeface="Calibri"/>
               </a:rPr>
               <a:t>A large open exercise book, seen from above, on a wooden table. The left page has a grid of five columns; the column heads are **icons only**: ① a small calendar ② a leaf and a taxi (what happened) ③ a coin with an arrow going in ④ a coin with an arrow going out ⑤ a tin. Rows have scribble marks, not numbers. ⑥ The right page is a separate list with a…</a:t>
             </a:r>
@@ -14185,7 +14185,7 @@
     <p:bg>
       <p:bgPr>
         <a:solidFill>
-          <a:srgbClr val="F7F2E9"/>
+          <a:srgbClr val="FFF4E0"/>
         </a:solidFill>
         <a:effectLst/>
       </p:bgPr>
@@ -14227,9 +14227,9 @@
             <a:r>
               <a:rPr sz="1000" b="0">
                 <a:solidFill>
-                  <a:srgbClr val="6B6255"/>
-                </a:solidFill>
-                <a:latin typeface="Arial"/>
+                  <a:srgbClr val="2B2B2B"/>
+                </a:solidFill>
+                <a:latin typeface="Calibri"/>
               </a:rPr>
               <a:t>R-D2-06   ·   Poster R-P08</a:t>
             </a:r>
@@ -14266,9 +14266,9 @@
             <a:r>
               <a:rPr sz="1000" b="0">
                 <a:solidFill>
-                  <a:srgbClr val="6B6255"/>
-                </a:solidFill>
-                <a:latin typeface="Arial"/>
+                  <a:srgbClr val="2B2B2B"/>
+                </a:solidFill>
+                <a:latin typeface="Calibri"/>
               </a:rPr>
               <a:t>Farmer Money</a:t>
             </a:r>
@@ -14305,9 +14305,9 @@
             <a:r>
               <a:rPr sz="3800" b="1">
                 <a:solidFill>
-                  <a:srgbClr val="1F4D2B"/>
-                </a:solidFill>
-                <a:latin typeface="Georgia"/>
+                  <a:srgbClr val="2B2B2B"/>
+                </a:solidFill>
+                <a:latin typeface="Arial Rounded MT Bold"/>
               </a:rPr>
               <a:t>A sale is not cash</a:t>
             </a:r>
@@ -14329,7 +14329,7 @@
             <a:avLst/>
           </a:prstGeom>
           <a:solidFill>
-            <a:srgbClr val="E2D8C4"/>
+            <a:srgbClr val="E0664A"/>
           </a:solidFill>
           <a:ln>
             <a:noFill/>
@@ -14388,9 +14388,9 @@
             <a:r>
               <a:rPr sz="2800" b="0">
                 <a:solidFill>
-                  <a:srgbClr val="20190F"/>
-                </a:solidFill>
-                <a:latin typeface="Arial"/>
+                  <a:srgbClr val="2B2B2B"/>
+                </a:solidFill>
+                <a:latin typeface="Calibri"/>
               </a:rPr>
               <a:t>•  Sold R590 this week</a:t>
             </a:r>
@@ -14404,9 +14404,9 @@
             <a:r>
               <a:rPr sz="2800" b="0">
                 <a:solidFill>
-                  <a:srgbClr val="20190F"/>
-                </a:solidFill>
-                <a:latin typeface="Arial"/>
+                  <a:srgbClr val="2B2B2B"/>
+                </a:solidFill>
+                <a:latin typeface="Calibri"/>
               </a:rPr>
               <a:t>•  Cash in: R390</a:t>
             </a:r>
@@ -14420,9 +14420,9 @@
             <a:r>
               <a:rPr sz="2800" b="0">
                 <a:solidFill>
-                  <a:srgbClr val="20190F"/>
-                </a:solidFill>
-                <a:latin typeface="Arial"/>
+                  <a:srgbClr val="2B2B2B"/>
+                </a:solidFill>
+                <a:latin typeface="Calibri"/>
               </a:rPr>
               <a:t>•  Spaza owes R200</a:t>
             </a:r>
@@ -14443,7 +14443,7 @@
     <p:bg>
       <p:bgPr>
         <a:solidFill>
-          <a:srgbClr val="F7F2E9"/>
+          <a:srgbClr val="FFF4E0"/>
         </a:solidFill>
         <a:effectLst/>
       </p:bgPr>
@@ -14485,9 +14485,9 @@
             <a:r>
               <a:rPr sz="1000" b="0">
                 <a:solidFill>
-                  <a:srgbClr val="6B6255"/>
-                </a:solidFill>
-                <a:latin typeface="Arial"/>
+                  <a:srgbClr val="2B2B2B"/>
+                </a:solidFill>
+                <a:latin typeface="Calibri"/>
               </a:rPr>
               <a:t>R-D2-07</a:t>
             </a:r>
@@ -14524,9 +14524,9 @@
             <a:r>
               <a:rPr sz="1000" b="0">
                 <a:solidFill>
-                  <a:srgbClr val="6B6255"/>
-                </a:solidFill>
-                <a:latin typeface="Arial"/>
+                  <a:srgbClr val="2B2B2B"/>
+                </a:solidFill>
+                <a:latin typeface="Calibri"/>
               </a:rPr>
               <a:t>Farmer Money</a:t>
             </a:r>
@@ -14548,7 +14548,7 @@
             <a:avLst/>
           </a:prstGeom>
           <a:solidFill>
-            <a:srgbClr val="235E86"/>
+            <a:srgbClr val="E0664A"/>
           </a:solidFill>
           <a:ln>
             <a:noFill/>
@@ -14607,9 +14607,9 @@
             <a:r>
               <a:rPr sz="1200" b="1">
                 <a:solidFill>
-                  <a:srgbClr val="F7F2E9"/>
-                </a:solidFill>
-                <a:latin typeface="Arial"/>
+                  <a:srgbClr val="FFF4E0"/>
+                </a:solidFill>
+                <a:latin typeface="Calibri"/>
               </a:rPr>
               <a:t>APP</a:t>
             </a:r>
@@ -14646,9 +14646,9 @@
             <a:r>
               <a:rPr sz="3800" b="1">
                 <a:solidFill>
-                  <a:srgbClr val="1F4D2B"/>
-                </a:solidFill>
-                <a:latin typeface="Georgia"/>
+                  <a:srgbClr val="2B2B2B"/>
+                </a:solidFill>
+                <a:latin typeface="Arial Rounded MT Bold"/>
               </a:rPr>
               <a:t>My Records: Sold and Spent</a:t>
             </a:r>
@@ -14670,7 +14670,7 @@
             <a:avLst/>
           </a:prstGeom>
           <a:solidFill>
-            <a:srgbClr val="E2D8C4"/>
+            <a:srgbClr val="E0664A"/>
           </a:solidFill>
           <a:ln>
             <a:noFill/>
@@ -14729,9 +14729,9 @@
             <a:r>
               <a:rPr sz="2800" b="0">
                 <a:solidFill>
-                  <a:srgbClr val="20190F"/>
-                </a:solidFill>
-                <a:latin typeface="Arial"/>
+                  <a:srgbClr val="2B2B2B"/>
+                </a:solidFill>
+                <a:latin typeface="Calibri"/>
               </a:rPr>
               <a:t>•  Picked · Sold · Spent · Charts</a:t>
             </a:r>
@@ -14745,9 +14745,9 @@
             <a:r>
               <a:rPr sz="2800" b="0">
                 <a:solidFill>
-                  <a:srgbClr val="20190F"/>
-                </a:solidFill>
-                <a:latin typeface="Arial"/>
+                  <a:srgbClr val="2B2B2B"/>
+                </a:solidFill>
+                <a:latin typeface="Calibri"/>
               </a:rPr>
               <a:t>•  Sold → Quick sale entry</a:t>
             </a:r>
@@ -14761,9 +14761,9 @@
             <a:r>
               <a:rPr sz="2800" b="0">
                 <a:solidFill>
-                  <a:srgbClr val="20190F"/>
-                </a:solidFill>
-                <a:latin typeface="Arial"/>
+                  <a:srgbClr val="2B2B2B"/>
+                </a:solidFill>
+                <a:latin typeface="Calibri"/>
               </a:rPr>
               <a:t>•  Spent → New entry</a:t>
             </a:r>
@@ -14808,7 +14808,7 @@
     <p:bg>
       <p:bgPr>
         <a:solidFill>
-          <a:srgbClr val="F7F2E9"/>
+          <a:srgbClr val="FFF4E0"/>
         </a:solidFill>
         <a:effectLst/>
       </p:bgPr>
@@ -14850,9 +14850,9 @@
             <a:r>
               <a:rPr sz="1000" b="0">
                 <a:solidFill>
-                  <a:srgbClr val="6B6255"/>
-                </a:solidFill>
-                <a:latin typeface="Arial"/>
+                  <a:srgbClr val="2B2B2B"/>
+                </a:solidFill>
+                <a:latin typeface="Calibri"/>
               </a:rPr>
               <a:t>R-D2-08</a:t>
             </a:r>
@@ -14889,9 +14889,9 @@
             <a:r>
               <a:rPr sz="1000" b="0">
                 <a:solidFill>
-                  <a:srgbClr val="6B6255"/>
-                </a:solidFill>
-                <a:latin typeface="Arial"/>
+                  <a:srgbClr val="2B2B2B"/>
+                </a:solidFill>
+                <a:latin typeface="Calibri"/>
               </a:rPr>
               <a:t>Farmer Money</a:t>
             </a:r>
@@ -14928,9 +14928,9 @@
             <a:r>
               <a:rPr sz="3800" b="1">
                 <a:solidFill>
-                  <a:srgbClr val="1F4D2B"/>
-                </a:solidFill>
-                <a:latin typeface="Georgia"/>
+                  <a:srgbClr val="2B2B2B"/>
+                </a:solidFill>
+                <a:latin typeface="Arial Rounded MT Bold"/>
               </a:rPr>
               <a:t>My own money book</a:t>
             </a:r>
@@ -14952,7 +14952,7 @@
             <a:avLst/>
           </a:prstGeom>
           <a:solidFill>
-            <a:srgbClr val="E2D8C4"/>
+            <a:srgbClr val="E0664A"/>
           </a:solidFill>
           <a:ln>
             <a:noFill/>
@@ -15011,9 +15011,9 @@
             <a:r>
               <a:rPr sz="2800" b="0">
                 <a:solidFill>
-                  <a:srgbClr val="20190F"/>
-                </a:solidFill>
-                <a:latin typeface="Arial"/>
+                  <a:srgbClr val="2B2B2B"/>
+                </a:solidFill>
+                <a:latin typeface="Calibri"/>
               </a:rPr>
               <a:t>•  Write your name on the cover</a:t>
             </a:r>
@@ -15027,9 +15027,9 @@
             <a:r>
               <a:rPr sz="2800" b="0">
                 <a:solidFill>
-                  <a:srgbClr val="20190F"/>
-                </a:solidFill>
-                <a:latin typeface="Arial"/>
+                  <a:srgbClr val="2B2B2B"/>
+                </a:solidFill>
+                <a:latin typeface="Calibri"/>
               </a:rPr>
               <a:t>•  Practise: Sizanani's Monday</a:t>
             </a:r>
@@ -15043,9 +15043,9 @@
             <a:r>
               <a:rPr sz="2800" b="0">
                 <a:solidFill>
-                  <a:srgbClr val="20190F"/>
-                </a:solidFill>
-                <a:latin typeface="Arial"/>
+                  <a:srgbClr val="2B2B2B"/>
+                </a:solidFill>
+                <a:latin typeface="Calibri"/>
               </a:rPr>
               <a:t>•  From tonight: your own garden</a:t>
             </a:r>
@@ -15067,11 +15067,11 @@
             <a:avLst/>
           </a:prstGeom>
           <a:solidFill>
-            <a:srgbClr val="FBF6EC"/>
+            <a:srgbClr val="FFF4E0"/>
           </a:solidFill>
           <a:ln w="15875">
             <a:solidFill>
-              <a:srgbClr val="E2D8C4"/>
+              <a:srgbClr val="E0664A"/>
             </a:solidFill>
           </a:ln>
           <a:effectLst/>
@@ -15128,9 +15128,9 @@
             <a:r>
               <a:rPr sz="1200" b="1">
                 <a:solidFill>
-                  <a:srgbClr val="C07A1E"/>
-                </a:solidFill>
-                <a:latin typeface="Arial"/>
+                  <a:srgbClr val="2A8C82"/>
+                </a:solidFill>
+                <a:latin typeface="Calibri"/>
               </a:rPr>
               <a:t>PHOTO · R-PHO-01 · coming</a:t>
             </a:r>
@@ -15167,9 +15167,9 @@
             <a:r>
               <a:rPr sz="1800" b="1">
                 <a:solidFill>
-                  <a:srgbClr val="1F4D2B"/>
-                </a:solidFill>
-                <a:latin typeface="Georgia"/>
+                  <a:srgbClr val="2B2B2B"/>
+                </a:solidFill>
+                <a:latin typeface="Arial Rounded MT Bold"/>
               </a:rPr>
               <a:t>A real money book page and tin</a:t>
             </a:r>
@@ -15206,9 +15206,9 @@
             <a:r>
               <a:rPr sz="1100" b="0">
                 <a:solidFill>
-                  <a:srgbClr val="20190F"/>
-                </a:solidFill>
-                <a:latin typeface="Arial"/>
+                  <a:srgbClr val="2B2B2B"/>
+                </a:solidFill>
+                <a:latin typeface="Calibri"/>
               </a:rPr>
               <a:t>Real photograph, taken by the programme on Day 0: the course money book (P1) open on a wooden table, filled in by hand with **Lerato's week** (made-up data — never a learner's real book), a pencil, and a tin with its lid off showing play money. Daylight, from above, no faces. 1920 × 1080.</a:t>
             </a:r>
@@ -15229,7 +15229,7 @@
     <p:bg>
       <p:bgPr>
         <a:solidFill>
-          <a:srgbClr val="1F4D2B"/>
+          <a:srgbClr val="4B2E4F"/>
         </a:solidFill>
         <a:effectLst/>
       </p:bgPr>
@@ -15271,9 +15271,9 @@
             <a:r>
               <a:rPr sz="1000" b="0">
                 <a:solidFill>
-                  <a:srgbClr val="A8D88A"/>
-                </a:solidFill>
-                <a:latin typeface="Arial"/>
+                  <a:srgbClr val="FFF4E0"/>
+                </a:solidFill>
+                <a:latin typeface="Calibri"/>
               </a:rPr>
               <a:t>R-D2-09   ·   Poster R-P09</a:t>
             </a:r>
@@ -15310,9 +15310,9 @@
             <a:r>
               <a:rPr sz="1000" b="0">
                 <a:solidFill>
-                  <a:srgbClr val="A8D88A"/>
-                </a:solidFill>
-                <a:latin typeface="Arial"/>
+                  <a:srgbClr val="FFF4E0"/>
+                </a:solidFill>
+                <a:latin typeface="Calibri"/>
               </a:rPr>
               <a:t>Farmer Money</a:t>
             </a:r>
@@ -15349,9 +15349,9 @@
             <a:r>
               <a:rPr sz="4800" b="1">
                 <a:solidFill>
-                  <a:srgbClr val="F7F2E9"/>
-                </a:solidFill>
-                <a:latin typeface="Georgia"/>
+                  <a:srgbClr val="FFF4E0"/>
+                </a:solidFill>
+                <a:latin typeface="Arial Rounded MT Bold"/>
               </a:rPr>
               <a:t>Where did the harvest go?</a:t>
             </a:r>
@@ -15373,7 +15373,7 @@
             <a:avLst/>
           </a:prstGeom>
           <a:solidFill>
-            <a:srgbClr val="C07A1E"/>
+            <a:srgbClr val="2A8C82"/>
           </a:solidFill>
           <a:ln>
             <a:noFill/>
@@ -15432,9 +15432,9 @@
             <a:r>
               <a:rPr sz="2400" b="0">
                 <a:solidFill>
-                  <a:srgbClr val="A8D88A"/>
-                </a:solidFill>
-                <a:latin typeface="Arial"/>
+                  <a:srgbClr val="FFF4E0"/>
+                </a:solidFill>
+                <a:latin typeface="Calibri"/>
               </a:rPr>
               <a:t>Eaten · shared · sold · lost</a:t>
             </a:r>
@@ -15456,11 +15456,11 @@
             <a:avLst/>
           </a:prstGeom>
           <a:solidFill>
-            <a:srgbClr val="FBF6EC"/>
+            <a:srgbClr val="FFF4E0"/>
           </a:solidFill>
           <a:ln w="15875">
             <a:solidFill>
-              <a:srgbClr val="E2D8C4"/>
+              <a:srgbClr val="E0664A"/>
             </a:solidFill>
           </a:ln>
           <a:effectLst/>
@@ -15517,9 +15517,9 @@
             <a:r>
               <a:rPr sz="1200" b="1">
                 <a:solidFill>
-                  <a:srgbClr val="C07A1E"/>
-                </a:solidFill>
-                <a:latin typeface="Arial"/>
+                  <a:srgbClr val="2A8C82"/>
+                </a:solidFill>
+                <a:latin typeface="Calibri"/>
               </a:rPr>
               <a:t>ANIMATION · R-ANI-06 · coming</a:t>
             </a:r>
@@ -15556,9 +15556,9 @@
             <a:r>
               <a:rPr sz="1800" b="1">
                 <a:solidFill>
-                  <a:srgbClr val="1F4D2B"/>
-                </a:solidFill>
-                <a:latin typeface="Georgia"/>
+                  <a:srgbClr val="2B2B2B"/>
+                </a:solidFill>
+                <a:latin typeface="Arial Rounded MT Bold"/>
               </a:rPr>
               <a:t>Where the harvest goes</a:t>
             </a:r>
@@ -15595,9 +15595,9 @@
             <a:r>
               <a:rPr sz="1100" b="0">
                 <a:solidFill>
-                  <a:srgbClr val="20190F"/>
-                </a:solidFill>
-                <a:latin typeface="Arial"/>
+                  <a:srgbClr val="2B2B2B"/>
+                </a:solidFill>
+                <a:latin typeface="Calibri"/>
               </a:rPr>
               <a:t>A full basket of greens (0–2 s). Bunches lift out and travel along four paths: to a family pot on a fire (4 bunches), over a fence to a neighbour (1), to a buyer at a gate who hands back coins (4), and one wilts and falls to a goat (1) (2–10 s). Beside the family pot, a coin stays in a purse (money saved) (10–12 s). Poster frame: the four paths.</a:t>
             </a:r>

--- a/courses/build/farmer-money/R-D2.pptx
+++ b/courses/build/farmer-money/R-D2.pptx
@@ -1955,7 +1955,7 @@
           </a:p>
           <a:p>
             <a:r>
-              <a:t>Clip R-ANI-07: public/course-animations/market-community/watch-04-farm-record.mp4</a:t>
+              <a:t>Clip R-ANI-07: public/course-media/farmer-money/R-ANI-07.mp4</a:t>
             </a:r>
           </a:p>
         </p:txBody>
